--- a/SSE vs SignalR.pptx
+++ b/SSE vs SignalR.pptx
@@ -27,24 +27,18 @@
     <p:embeddedFont>
       <p:font typeface="Karla" pitchFamily="2" charset="0"/>
       <p:regular r:id="rId18"/>
-      <p:bold r:id="rId19"/>
-      <p:italic r:id="rId20"/>
-      <p:boldItalic r:id="rId21"/>
     </p:embeddedFont>
     <p:embeddedFont>
       <p:font typeface="Karla Light" pitchFamily="2" charset="0"/>
-      <p:regular r:id="rId22"/>
-      <p:italic r:id="rId23"/>
+      <p:regular r:id="rId19"/>
     </p:embeddedFont>
     <p:embeddedFont>
       <p:font typeface="Karla Medium" pitchFamily="2" charset="0"/>
-      <p:regular r:id="rId24"/>
-      <p:italic r:id="rId25"/>
+      <p:regular r:id="rId20"/>
     </p:embeddedFont>
     <p:embeddedFont>
       <p:font typeface="Montserrat SemiBold" panose="00000700000000000000" pitchFamily="2" charset="0"/>
-      <p:bold r:id="rId26"/>
-      <p:boldItalic r:id="rId27"/>
+      <p:bold r:id="rId21"/>
     </p:embeddedFont>
   </p:embeddedFontLst>
   <p:defaultTextStyle>
@@ -245,7 +239,7 @@
           <a:p>
             <a:fld id="{7FA1223C-D946-48A3-AE59-BDFF8BA92F9C}" type="datetimeFigureOut">
               <a:rPr lang="en-US" smtClean="0"/>
-              <a:t>15-09-26</a:t>
+              <a:t>9/18/2026</a:t>
             </a:fld>
             <a:endParaRPr lang="en-US"/>
           </a:p>
@@ -3799,14 +3793,6 @@
   <p:clrMapOvr>
     <a:masterClrMapping/>
   </p:clrMapOvr>
-  <mc:AlternateContent xmlns:mc="http://schemas.openxmlformats.org/markup-compatibility/2006" xmlns:p14="http://schemas.microsoft.com/office/powerpoint/2010/main">
-    <mc:Choice Requires="p14">
-      <p:transition spd="slow" p14:dur="2000" advTm="10000"/>
-    </mc:Choice>
-    <mc:Fallback xmlns="">
-      <p:transition spd="slow" advTm="10000"/>
-    </mc:Fallback>
-  </mc:AlternateContent>
 </p:sld>
 </file>
 
@@ -11483,6 +11469,12 @@
 </file>
 
 <file path=customXml/item2.xml><?xml version="1.0" encoding="utf-8"?>
+<p:properties xmlns:p="http://schemas.microsoft.com/office/2006/metadata/properties" xmlns:xsi="http://www.w3.org/2001/XMLSchema-instance" xmlns:pc="http://schemas.microsoft.com/office/infopath/2007/PartnerControls">
+  <documentManagement/>
+</p:properties>
+</file>
+
+<file path=customXml/item3.xml><?xml version="1.0" encoding="utf-8"?>
 <ct:contentTypeSchema xmlns:ct="http://schemas.microsoft.com/office/2006/metadata/contentType" xmlns:ma="http://schemas.microsoft.com/office/2006/metadata/properties/metaAttributes" ct:_="" ma:_="" ma:contentTypeName="Document" ma:contentTypeID="0x010100B1EDA3959F5652479FD22C0F2500B83D" ma:contentTypeVersion="6" ma:contentTypeDescription="Een nieuw document maken." ma:contentTypeScope="" ma:versionID="b2766be02785903ad09cd51475cb1dc1">
   <xsd:schema xmlns:xsd="http://www.w3.org/2001/XMLSchema" xmlns:xs="http://www.w3.org/2001/XMLSchema" xmlns:p="http://schemas.microsoft.com/office/2006/metadata/properties" xmlns:ns2="07de09e0-31b5-4a84-a978-2ff52100208d" xmlns:ns3="3dadfc23-1fe6-46f5-b9b3-2c47db85b832" targetNamespace="http://schemas.microsoft.com/office/2006/metadata/properties" ma:root="true" ma:fieldsID="ca2aac55a5561dc83b4c6d505b892845" ns2:_="" ns3:_="">
     <xsd:import namespace="07de09e0-31b5-4a84-a978-2ff52100208d"/>
@@ -11659,12 +11651,6 @@
 </ct:contentTypeSchema>
 </file>
 
-<file path=customXml/item3.xml><?xml version="1.0" encoding="utf-8"?>
-<p:properties xmlns:p="http://schemas.microsoft.com/office/2006/metadata/properties" xmlns:xsi="http://www.w3.org/2001/XMLSchema-instance" xmlns:pc="http://schemas.microsoft.com/office/infopath/2007/PartnerControls">
-  <documentManagement/>
-</p:properties>
-</file>
-
 <file path=customXml/itemProps1.xml><?xml version="1.0" encoding="utf-8"?>
 <ds:datastoreItem xmlns:ds="http://schemas.openxmlformats.org/officeDocument/2006/customXml" ds:itemID="{D4819A24-FD0A-4873-9FDC-B9C8DEC9FA8B}">
   <ds:schemaRefs>
@@ -11674,6 +11660,23 @@
 </file>
 
 <file path=customXml/itemProps2.xml><?xml version="1.0" encoding="utf-8"?>
+<ds:datastoreItem xmlns:ds="http://schemas.openxmlformats.org/officeDocument/2006/customXml" ds:itemID="{1178E873-92C9-406A-8507-D2C894A91B27}">
+  <ds:schemaRefs>
+    <ds:schemaRef ds:uri="http://purl.org/dc/dcmitype/"/>
+    <ds:schemaRef ds:uri="http://schemas.microsoft.com/office/2006/documentManagement/types"/>
+    <ds:schemaRef ds:uri="http://schemas.microsoft.com/office/infopath/2007/PartnerControls"/>
+    <ds:schemaRef ds:uri="http://schemas.microsoft.com/office/2006/metadata/properties"/>
+    <ds:schemaRef ds:uri="http://www.w3.org/XML/1998/namespace"/>
+    <ds:schemaRef ds:uri="http://purl.org/dc/terms/"/>
+    <ds:schemaRef ds:uri="http://purl.org/dc/elements/1.1/"/>
+    <ds:schemaRef ds:uri="http://schemas.openxmlformats.org/package/2006/metadata/core-properties"/>
+    <ds:schemaRef ds:uri="3dadfc23-1fe6-46f5-b9b3-2c47db85b832"/>
+    <ds:schemaRef ds:uri="07de09e0-31b5-4a84-a978-2ff52100208d"/>
+  </ds:schemaRefs>
+</ds:datastoreItem>
+</file>
+
+<file path=customXml/itemProps3.xml><?xml version="1.0" encoding="utf-8"?>
 <ds:datastoreItem xmlns:ds="http://schemas.openxmlformats.org/officeDocument/2006/customXml" ds:itemID="{7E56D321-BAD3-422D-A440-F81935A3B294}">
   <ds:schemaRefs>
     <ds:schemaRef ds:uri="http://schemas.microsoft.com/office/2006/metadata/contentType"/>
@@ -11690,21 +11693,4 @@
     <ds:schemaRef ds:uri="http://schemas.microsoft.com/internal/obd"/>
   </ds:schemaRefs>
 </ds:datastoreItem>
-</file>
-
-<file path=customXml/itemProps3.xml><?xml version="1.0" encoding="utf-8"?>
-<ds:datastoreItem xmlns:ds="http://schemas.openxmlformats.org/officeDocument/2006/customXml" ds:itemID="{1178E873-92C9-406A-8507-D2C894A91B27}">
-  <ds:schemaRefs>
-    <ds:schemaRef ds:uri="http://purl.org/dc/dcmitype/"/>
-    <ds:schemaRef ds:uri="http://schemas.microsoft.com/office/2006/documentManagement/types"/>
-    <ds:schemaRef ds:uri="http://schemas.microsoft.com/office/infopath/2007/PartnerControls"/>
-    <ds:schemaRef ds:uri="http://schemas.microsoft.com/office/2006/metadata/properties"/>
-    <ds:schemaRef ds:uri="http://www.w3.org/XML/1998/namespace"/>
-    <ds:schemaRef ds:uri="http://purl.org/dc/terms/"/>
-    <ds:schemaRef ds:uri="http://purl.org/dc/elements/1.1/"/>
-    <ds:schemaRef ds:uri="http://schemas.openxmlformats.org/package/2006/metadata/core-properties"/>
-    <ds:schemaRef ds:uri="3dadfc23-1fe6-46f5-b9b3-2c47db85b832"/>
-    <ds:schemaRef ds:uri="07de09e0-31b5-4a84-a978-2ff52100208d"/>
-  </ds:schemaRefs>
-</ds:datastoreItem>
 </file>
--- a/SSE vs SignalR.pptx
+++ b/SSE vs SignalR.pptx
@@ -4963,8 +4963,8 @@
         </p:nvGrpSpPr>
         <p:grpSpPr>
           <a:xfrm>
-            <a:off x="1819275" y="2400300"/>
-            <a:ext cx="5105399" cy="7305675"/>
+            <a:off x="1819275" y="2400301"/>
+            <a:ext cx="5105399" cy="5867400"/>
             <a:chOff x="1819275" y="2400300"/>
             <a:chExt cx="5105399" cy="7305675"/>
           </a:xfrm>
@@ -5314,7 +5314,7 @@
         <p:grpSpPr>
           <a:xfrm>
             <a:off x="7372350" y="2380654"/>
-            <a:ext cx="5943600" cy="7325320"/>
+            <a:ext cx="5943600" cy="5865854"/>
             <a:chOff x="7372350" y="2380654"/>
             <a:chExt cx="5943600" cy="7325320"/>
           </a:xfrm>
@@ -6028,8 +6028,8 @@
         </p:nvGrpSpPr>
         <p:grpSpPr>
           <a:xfrm>
-            <a:off x="12801600" y="2341363"/>
-            <a:ext cx="5353050" cy="7364611"/>
+            <a:off x="12801600" y="2341364"/>
+            <a:ext cx="5353050" cy="5926338"/>
             <a:chOff x="12801600" y="2341363"/>
             <a:chExt cx="5353050" cy="7364611"/>
           </a:xfrm>
@@ -6338,7 +6338,7 @@
         </p:nvSpPr>
         <p:spPr>
           <a:xfrm>
-            <a:off x="12982573" y="8791575"/>
+            <a:off x="12996860" y="7263097"/>
             <a:ext cx="4229102" cy="369332"/>
           </a:xfrm>
           <a:prstGeom prst="rect">
@@ -6382,7 +6382,7 @@
         </p:nvSpPr>
         <p:spPr>
           <a:xfrm>
-            <a:off x="8281987" y="6060507"/>
+            <a:off x="8281987" y="5346132"/>
             <a:ext cx="2728912" cy="369332"/>
           </a:xfrm>
           <a:prstGeom prst="rect">
@@ -6418,7 +6418,7 @@
         </p:nvSpPr>
         <p:spPr>
           <a:xfrm>
-            <a:off x="13838901" y="6031253"/>
+            <a:off x="13739813" y="5346132"/>
             <a:ext cx="2728912" cy="369332"/>
           </a:xfrm>
           <a:prstGeom prst="rect">
@@ -6437,6 +6437,43 @@
               <a:rPr lang="en-US" dirty="0"/>
               <a:t>Connection stays open</a:t>
             </a:r>
+          </a:p>
+        </p:txBody>
+      </p:sp>
+      <p:sp>
+        <p:nvSpPr>
+          <p:cNvPr id="4" name="TextBox 3">
+            <a:extLst>
+              <a:ext uri="{FF2B5EF4-FFF2-40B4-BE49-F238E27FC236}">
+                <a16:creationId xmlns:a16="http://schemas.microsoft.com/office/drawing/2014/main" id="{F3B7C0C0-46AE-0634-CFAB-DD7631039E88}"/>
+              </a:ext>
+            </a:extLst>
+          </p:cNvPr>
+          <p:cNvSpPr txBox="1"/>
+          <p:nvPr/>
+        </p:nvSpPr>
+        <p:spPr>
+          <a:xfrm>
+            <a:off x="7324724" y="8518298"/>
+            <a:ext cx="10172701" cy="461665"/>
+          </a:xfrm>
+          <a:prstGeom prst="rect">
+            <a:avLst/>
+          </a:prstGeom>
+          <a:noFill/>
+        </p:spPr>
+        <p:txBody>
+          <a:bodyPr wrap="square" rtlCol="0">
+            <a:spAutoFit/>
+          </a:bodyPr>
+          <a:lstStyle/>
+          <a:p>
+            <a:pPr algn="l"/>
+            <a:r>
+              <a:rPr lang="en-US" sz="2400" dirty="0"/>
+              <a:t>Server pushes updates to clients in real time - as soon as events occur</a:t>
+            </a:r>
+            <a:endParaRPr lang="en-BE" sz="2400" dirty="0" err="1"/>
           </a:p>
         </p:txBody>
       </p:sp>
@@ -6852,6 +6889,128 @@
                       </p:childTnLst>
                     </p:cTn>
                   </p:par>
+                  <p:par>
+                    <p:cTn id="35" fill="hold">
+                      <p:stCondLst>
+                        <p:cond delay="indefinite"/>
+                      </p:stCondLst>
+                      <p:childTnLst>
+                        <p:par>
+                          <p:cTn id="36" fill="hold">
+                            <p:stCondLst>
+                              <p:cond delay="0"/>
+                            </p:stCondLst>
+                            <p:childTnLst>
+                              <p:par>
+                                <p:cTn id="37" presetID="31" presetClass="entr" presetSubtype="0" fill="hold" grpId="0" nodeType="clickEffect">
+                                  <p:stCondLst>
+                                    <p:cond delay="0"/>
+                                  </p:stCondLst>
+                                  <p:childTnLst>
+                                    <p:set>
+                                      <p:cBhvr>
+                                        <p:cTn id="38" dur="1" fill="hold">
+                                          <p:stCondLst>
+                                            <p:cond delay="0"/>
+                                          </p:stCondLst>
+                                        </p:cTn>
+                                        <p:tgtEl>
+                                          <p:spTgt spid="4"/>
+                                        </p:tgtEl>
+                                        <p:attrNameLst>
+                                          <p:attrName>style.visibility</p:attrName>
+                                        </p:attrNameLst>
+                                      </p:cBhvr>
+                                      <p:to>
+                                        <p:strVal val="visible"/>
+                                      </p:to>
+                                    </p:set>
+                                    <p:anim calcmode="lin" valueType="num">
+                                      <p:cBhvr>
+                                        <p:cTn id="39" dur="1000" fill="hold"/>
+                                        <p:tgtEl>
+                                          <p:spTgt spid="4"/>
+                                        </p:tgtEl>
+                                        <p:attrNameLst>
+                                          <p:attrName>ppt_w</p:attrName>
+                                        </p:attrNameLst>
+                                      </p:cBhvr>
+                                      <p:tavLst>
+                                        <p:tav tm="0">
+                                          <p:val>
+                                            <p:fltVal val="0"/>
+                                          </p:val>
+                                        </p:tav>
+                                        <p:tav tm="100000">
+                                          <p:val>
+                                            <p:strVal val="#ppt_w"/>
+                                          </p:val>
+                                        </p:tav>
+                                      </p:tavLst>
+                                    </p:anim>
+                                    <p:anim calcmode="lin" valueType="num">
+                                      <p:cBhvr>
+                                        <p:cTn id="40" dur="1000" fill="hold"/>
+                                        <p:tgtEl>
+                                          <p:spTgt spid="4"/>
+                                        </p:tgtEl>
+                                        <p:attrNameLst>
+                                          <p:attrName>ppt_h</p:attrName>
+                                        </p:attrNameLst>
+                                      </p:cBhvr>
+                                      <p:tavLst>
+                                        <p:tav tm="0">
+                                          <p:val>
+                                            <p:fltVal val="0"/>
+                                          </p:val>
+                                        </p:tav>
+                                        <p:tav tm="100000">
+                                          <p:val>
+                                            <p:strVal val="#ppt_h"/>
+                                          </p:val>
+                                        </p:tav>
+                                      </p:tavLst>
+                                    </p:anim>
+                                    <p:anim calcmode="lin" valueType="num">
+                                      <p:cBhvr>
+                                        <p:cTn id="41" dur="1000" fill="hold"/>
+                                        <p:tgtEl>
+                                          <p:spTgt spid="4"/>
+                                        </p:tgtEl>
+                                        <p:attrNameLst>
+                                          <p:attrName>style.rotation</p:attrName>
+                                        </p:attrNameLst>
+                                      </p:cBhvr>
+                                      <p:tavLst>
+                                        <p:tav tm="0">
+                                          <p:val>
+                                            <p:fltVal val="90"/>
+                                          </p:val>
+                                        </p:tav>
+                                        <p:tav tm="100000">
+                                          <p:val>
+                                            <p:fltVal val="0"/>
+                                          </p:val>
+                                        </p:tav>
+                                      </p:tavLst>
+                                    </p:anim>
+                                    <p:animEffect transition="in" filter="fade">
+                                      <p:cBhvr>
+                                        <p:cTn id="42" dur="1000"/>
+                                        <p:tgtEl>
+                                          <p:spTgt spid="4"/>
+                                        </p:tgtEl>
+                                      </p:cBhvr>
+                                    </p:animEffect>
+                                  </p:childTnLst>
+                                </p:cTn>
+                              </p:par>
+                            </p:childTnLst>
+                          </p:cTn>
+                        </p:par>
+                      </p:childTnLst>
+                    </p:cTn>
+                  </p:par>
                 </p:childTnLst>
               </p:cTn>
               <p:prevCondLst>
@@ -6877,6 +7036,7 @@
       <p:bldP spid="55" grpId="0"/>
       <p:bldP spid="3" grpId="0"/>
       <p:bldP spid="5" grpId="0"/>
+      <p:bldP spid="4" grpId="0"/>
     </p:bldLst>
   </p:timing>
 </p:sld>
@@ -9654,7 +9814,7 @@
           <p:nvPr>
             <p:extLst>
               <p:ext uri="{D42A27DB-BD31-4B8C-83A1-F6EECF244321}">
-                <p14:modId xmlns:p14="http://schemas.microsoft.com/office/powerpoint/2010/main" val="367938717"/>
+                <p14:modId xmlns:p14="http://schemas.microsoft.com/office/powerpoint/2010/main" val="3731875746"/>
               </p:ext>
             </p:extLst>
           </p:nvPr>
@@ -10087,7 +10247,10 @@
                         <a:rPr lang="en-US" dirty="0" err="1"/>
                         <a:t>EventSource</a:t>
                       </a:r>
-                      <a:endParaRPr lang="en-US" dirty="0"/>
+                      <a:r>
+                        <a:rPr lang="en-US" dirty="0"/>
+                        <a:t> (light weight)</a:t>
+                      </a:r>
                     </a:p>
                   </a:txBody>
                   <a:tcPr/>
@@ -11460,21 +11623,6 @@
 </file>
 
 <file path=customXml/item1.xml><?xml version="1.0" encoding="utf-8"?>
-<?mso-contentType ?>
-<FormTemplates xmlns="http://schemas.microsoft.com/sharepoint/v3/contenttype/forms">
-  <Display>DocumentLibraryForm</Display>
-  <Edit>DocumentLibraryForm</Edit>
-  <New>DocumentLibraryForm</New>
-</FormTemplates>
-</file>
-
-<file path=customXml/item2.xml><?xml version="1.0" encoding="utf-8"?>
-<p:properties xmlns:p="http://schemas.microsoft.com/office/2006/metadata/properties" xmlns:xsi="http://www.w3.org/2001/XMLSchema-instance" xmlns:pc="http://schemas.microsoft.com/office/infopath/2007/PartnerControls">
-  <documentManagement/>
-</p:properties>
-</file>
-
-<file path=customXml/item3.xml><?xml version="1.0" encoding="utf-8"?>
 <ct:contentTypeSchema xmlns:ct="http://schemas.microsoft.com/office/2006/metadata/contentType" xmlns:ma="http://schemas.microsoft.com/office/2006/metadata/properties/metaAttributes" ct:_="" ma:_="" ma:contentTypeName="Document" ma:contentTypeID="0x010100B1EDA3959F5652479FD22C0F2500B83D" ma:contentTypeVersion="6" ma:contentTypeDescription="Een nieuw document maken." ma:contentTypeScope="" ma:versionID="b2766be02785903ad09cd51475cb1dc1">
   <xsd:schema xmlns:xsd="http://www.w3.org/2001/XMLSchema" xmlns:xs="http://www.w3.org/2001/XMLSchema" xmlns:p="http://schemas.microsoft.com/office/2006/metadata/properties" xmlns:ns2="07de09e0-31b5-4a84-a978-2ff52100208d" xmlns:ns3="3dadfc23-1fe6-46f5-b9b3-2c47db85b832" targetNamespace="http://schemas.microsoft.com/office/2006/metadata/properties" ma:root="true" ma:fieldsID="ca2aac55a5561dc83b4c6d505b892845" ns2:_="" ns3:_="">
     <xsd:import namespace="07de09e0-31b5-4a84-a978-2ff52100208d"/>
@@ -11651,10 +11799,36 @@
 </ct:contentTypeSchema>
 </file>
 
+<file path=customXml/item2.xml><?xml version="1.0" encoding="utf-8"?>
+<p:properties xmlns:p="http://schemas.microsoft.com/office/2006/metadata/properties" xmlns:xsi="http://www.w3.org/2001/XMLSchema-instance" xmlns:pc="http://schemas.microsoft.com/office/infopath/2007/PartnerControls">
+  <documentManagement/>
+</p:properties>
+</file>
+
+<file path=customXml/item3.xml><?xml version="1.0" encoding="utf-8"?>
+<?mso-contentType ?>
+<FormTemplates xmlns="http://schemas.microsoft.com/sharepoint/v3/contenttype/forms">
+  <Display>DocumentLibraryForm</Display>
+  <Edit>DocumentLibraryForm</Edit>
+  <New>DocumentLibraryForm</New>
+</FormTemplates>
+</file>
+
 <file path=customXml/itemProps1.xml><?xml version="1.0" encoding="utf-8"?>
-<ds:datastoreItem xmlns:ds="http://schemas.openxmlformats.org/officeDocument/2006/customXml" ds:itemID="{D4819A24-FD0A-4873-9FDC-B9C8DEC9FA8B}">
+<ds:datastoreItem xmlns:ds="http://schemas.openxmlformats.org/officeDocument/2006/customXml" ds:itemID="{7E56D321-BAD3-422D-A440-F81935A3B294}">
   <ds:schemaRefs>
-    <ds:schemaRef ds:uri="http://schemas.microsoft.com/sharepoint/v3/contenttype/forms"/>
+    <ds:schemaRef ds:uri="http://schemas.microsoft.com/office/2006/metadata/contentType"/>
+    <ds:schemaRef ds:uri="http://schemas.microsoft.com/office/2006/metadata/properties/metaAttributes"/>
+    <ds:schemaRef ds:uri="http://www.w3.org/2001/XMLSchema"/>
+    <ds:schemaRef ds:uri="http://schemas.microsoft.com/office/2006/metadata/properties"/>
+    <ds:schemaRef ds:uri="07de09e0-31b5-4a84-a978-2ff52100208d"/>
+    <ds:schemaRef ds:uri="3dadfc23-1fe6-46f5-b9b3-2c47db85b832"/>
+    <ds:schemaRef ds:uri="http://schemas.microsoft.com/office/2006/documentManagement/types"/>
+    <ds:schemaRef ds:uri="http://schemas.microsoft.com/office/infopath/2007/PartnerControls"/>
+    <ds:schemaRef ds:uri="http://schemas.openxmlformats.org/package/2006/metadata/core-properties"/>
+    <ds:schemaRef ds:uri="http://purl.org/dc/elements/1.1/"/>
+    <ds:schemaRef ds:uri="http://purl.org/dc/terms/"/>
+    <ds:schemaRef ds:uri="http://schemas.microsoft.com/internal/obd"/>
   </ds:schemaRefs>
 </ds:datastoreItem>
 </file>
@@ -11677,20 +11851,15 @@
 </file>
 
 <file path=customXml/itemProps3.xml><?xml version="1.0" encoding="utf-8"?>
-<ds:datastoreItem xmlns:ds="http://schemas.openxmlformats.org/officeDocument/2006/customXml" ds:itemID="{7E56D321-BAD3-422D-A440-F81935A3B294}">
+<ds:datastoreItem xmlns:ds="http://schemas.openxmlformats.org/officeDocument/2006/customXml" ds:itemID="{D4819A24-FD0A-4873-9FDC-B9C8DEC9FA8B}">
   <ds:schemaRefs>
-    <ds:schemaRef ds:uri="http://schemas.microsoft.com/office/2006/metadata/contentType"/>
-    <ds:schemaRef ds:uri="http://schemas.microsoft.com/office/2006/metadata/properties/metaAttributes"/>
-    <ds:schemaRef ds:uri="http://www.w3.org/2001/XMLSchema"/>
-    <ds:schemaRef ds:uri="http://schemas.microsoft.com/office/2006/metadata/properties"/>
-    <ds:schemaRef ds:uri="07de09e0-31b5-4a84-a978-2ff52100208d"/>
-    <ds:schemaRef ds:uri="3dadfc23-1fe6-46f5-b9b3-2c47db85b832"/>
-    <ds:schemaRef ds:uri="http://schemas.microsoft.com/office/2006/documentManagement/types"/>
-    <ds:schemaRef ds:uri="http://schemas.microsoft.com/office/infopath/2007/PartnerControls"/>
-    <ds:schemaRef ds:uri="http://schemas.openxmlformats.org/package/2006/metadata/core-properties"/>
-    <ds:schemaRef ds:uri="http://purl.org/dc/elements/1.1/"/>
-    <ds:schemaRef ds:uri="http://purl.org/dc/terms/"/>
-    <ds:schemaRef ds:uri="http://schemas.microsoft.com/internal/obd"/>
+    <ds:schemaRef ds:uri="http://schemas.microsoft.com/sharepoint/v3/contenttype/forms"/>
   </ds:schemaRefs>
 </ds:datastoreItem>
+</file>
+
+<file path=docMetadata/LabelInfo.xml><?xml version="1.0" encoding="utf-8"?>
+<clbl:labelList xmlns:clbl="http://schemas.microsoft.com/office/2020/mipLabelMetadata">
+  <clbl:label id="{0a9b9e15-83d2-4075-9282-a04e05c6580a}" enabled="1" method="Standard" siteId="{24139d14-c62c-4c47-8bdd-ce71ea1d50cf}" contentBits="0" removed="0"/>
+</clbl:labelList>
 </file>
--- a/SSE vs SignalR.pptx
+++ b/SSE vs SignalR.pptx
@@ -4141,7 +4141,7 @@
         </p:nvSpPr>
         <p:spPr>
           <a:xfrm>
-            <a:off x="1819275" y="2320877"/>
+            <a:off x="1819275" y="3230116"/>
             <a:ext cx="13735050" cy="584775"/>
           </a:xfrm>
           <a:prstGeom prst="rect">
@@ -4180,7 +4180,7 @@
         </p:nvSpPr>
         <p:spPr>
           <a:xfrm>
-            <a:off x="1819275" y="3272926"/>
+            <a:off x="1819275" y="4052235"/>
             <a:ext cx="13735050" cy="584775"/>
           </a:xfrm>
           <a:prstGeom prst="rect">
@@ -4223,7 +4223,7 @@
         </p:nvSpPr>
         <p:spPr>
           <a:xfrm>
-            <a:off x="1819275" y="4224975"/>
+            <a:off x="1819275" y="2407997"/>
             <a:ext cx="13735050" cy="584775"/>
           </a:xfrm>
           <a:prstGeom prst="rect">
@@ -4327,7 +4327,7 @@
                                           </p:stCondLst>
                                         </p:cTn>
                                         <p:tgtEl>
-                                          <p:spTgt spid="5"/>
+                                          <p:spTgt spid="4"/>
                                         </p:tgtEl>
                                         <p:attrNameLst>
                                           <p:attrName>style.visibility</p:attrName>
@@ -4341,7 +4341,7 @@
                                       <p:cBhvr>
                                         <p:cTn id="7" dur="2000"/>
                                         <p:tgtEl>
-                                          <p:spTgt spid="5"/>
+                                          <p:spTgt spid="4"/>
                                         </p:tgtEl>
                                       </p:cBhvr>
                                     </p:animEffect>
@@ -4380,7 +4380,7 @@
                                           </p:stCondLst>
                                         </p:cTn>
                                         <p:tgtEl>
-                                          <p:spTgt spid="9"/>
+                                          <p:spTgt spid="5"/>
                                         </p:tgtEl>
                                         <p:attrNameLst>
                                           <p:attrName>style.visibility</p:attrName>
@@ -4394,7 +4394,7 @@
                                       <p:cBhvr>
                                         <p:cTn id="12" dur="2000"/>
                                         <p:tgtEl>
-                                          <p:spTgt spid="9"/>
+                                          <p:spTgt spid="5"/>
                                         </p:tgtEl>
                                       </p:cBhvr>
                                     </p:animEffect>
@@ -4433,7 +4433,7 @@
                                           </p:stCondLst>
                                         </p:cTn>
                                         <p:tgtEl>
-                                          <p:spTgt spid="4"/>
+                                          <p:spTgt spid="9"/>
                                         </p:tgtEl>
                                         <p:attrNameLst>
                                           <p:attrName>style.visibility</p:attrName>
@@ -4447,7 +4447,7 @@
                                       <p:cBhvr>
                                         <p:cTn id="17" dur="2000"/>
                                         <p:tgtEl>
-                                          <p:spTgt spid="4"/>
+                                          <p:spTgt spid="9"/>
                                         </p:tgtEl>
                                       </p:cBhvr>
                                     </p:animEffect>
@@ -9814,14 +9814,14 @@
           <p:nvPr>
             <p:extLst>
               <p:ext uri="{D42A27DB-BD31-4B8C-83A1-F6EECF244321}">
-                <p14:modId xmlns:p14="http://schemas.microsoft.com/office/powerpoint/2010/main" val="3731875746"/>
+                <p14:modId xmlns:p14="http://schemas.microsoft.com/office/powerpoint/2010/main" val="2064315203"/>
               </p:ext>
             </p:extLst>
           </p:nvPr>
         </p:nvGraphicFramePr>
         <p:xfrm>
           <a:off x="3108960" y="2692895"/>
-          <a:ext cx="12192000" cy="2595880"/>
+          <a:ext cx="12192000" cy="2966720"/>
         </p:xfrm>
         <a:graphic>
           <a:graphicData uri="http://schemas.openxmlformats.org/drawingml/2006/table">
@@ -9960,6 +9960,52 @@
                 <a:extLst>
                   <a:ext uri="{0D108BD9-81ED-4DB2-BD59-A6C34878D82A}">
                     <a16:rowId xmlns:a16="http://schemas.microsoft.com/office/drawing/2014/main" val="2497804682"/>
+                  </a:ext>
+                </a:extLst>
+              </a:tr>
+              <a:tr h="370840">
+                <a:tc>
+                  <a:txBody>
+                    <a:bodyPr/>
+                    <a:lstStyle/>
+                    <a:p>
+                      <a:r>
+                        <a:rPr lang="en-US" dirty="0"/>
+                        <a:t>-&gt; Client -&gt; Server </a:t>
+                      </a:r>
+                    </a:p>
+                  </a:txBody>
+                  <a:tcPr/>
+                </a:tc>
+                <a:tc>
+                  <a:txBody>
+                    <a:bodyPr/>
+                    <a:lstStyle/>
+                    <a:p>
+                      <a:r>
+                        <a:rPr lang="en-US" dirty="0"/>
+                        <a:t>Built-in</a:t>
+                      </a:r>
+                    </a:p>
+                  </a:txBody>
+                  <a:tcPr/>
+                </a:tc>
+                <a:tc>
+                  <a:txBody>
+                    <a:bodyPr/>
+                    <a:lstStyle/>
+                    <a:p>
+                      <a:r>
+                        <a:rPr lang="en-US" dirty="0"/>
+                        <a:t>Separate Http requests needed</a:t>
+                      </a:r>
+                    </a:p>
+                  </a:txBody>
+                  <a:tcPr/>
+                </a:tc>
+                <a:extLst>
+                  <a:ext uri="{0D108BD9-81ED-4DB2-BD59-A6C34878D82A}">
+                    <a16:rowId xmlns:a16="http://schemas.microsoft.com/office/drawing/2014/main" val="4164792389"/>
                   </a:ext>
                 </a:extLst>
               </a:tr>
@@ -10493,7 +10539,7 @@
             </a:pPr>
             <a:r>
               <a:rPr lang="en-US" sz="3200" dirty="0"/>
-              <a:t>Trade-offs (users/groups)</a:t>
+              <a:t>Trade-offs (users/groups/broadcasting)</a:t>
             </a:r>
           </a:p>
         </p:txBody>
@@ -11623,6 +11669,21 @@
 </file>
 
 <file path=customXml/item1.xml><?xml version="1.0" encoding="utf-8"?>
+<?mso-contentType ?>
+<FormTemplates xmlns="http://schemas.microsoft.com/sharepoint/v3/contenttype/forms">
+  <Display>DocumentLibraryForm</Display>
+  <Edit>DocumentLibraryForm</Edit>
+  <New>DocumentLibraryForm</New>
+</FormTemplates>
+</file>
+
+<file path=customXml/item2.xml><?xml version="1.0" encoding="utf-8"?>
+<p:properties xmlns:p="http://schemas.microsoft.com/office/2006/metadata/properties" xmlns:xsi="http://www.w3.org/2001/XMLSchema-instance" xmlns:pc="http://schemas.microsoft.com/office/infopath/2007/PartnerControls">
+  <documentManagement/>
+</p:properties>
+</file>
+
+<file path=customXml/item3.xml><?xml version="1.0" encoding="utf-8"?>
 <ct:contentTypeSchema xmlns:ct="http://schemas.microsoft.com/office/2006/metadata/contentType" xmlns:ma="http://schemas.microsoft.com/office/2006/metadata/properties/metaAttributes" ct:_="" ma:_="" ma:contentTypeName="Document" ma:contentTypeID="0x010100B1EDA3959F5652479FD22C0F2500B83D" ma:contentTypeVersion="6" ma:contentTypeDescription="Een nieuw document maken." ma:contentTypeScope="" ma:versionID="b2766be02785903ad09cd51475cb1dc1">
   <xsd:schema xmlns:xsd="http://www.w3.org/2001/XMLSchema" xmlns:xs="http://www.w3.org/2001/XMLSchema" xmlns:p="http://schemas.microsoft.com/office/2006/metadata/properties" xmlns:ns2="07de09e0-31b5-4a84-a978-2ff52100208d" xmlns:ns3="3dadfc23-1fe6-46f5-b9b3-2c47db85b832" targetNamespace="http://schemas.microsoft.com/office/2006/metadata/properties" ma:root="true" ma:fieldsID="ca2aac55a5561dc83b4c6d505b892845" ns2:_="" ns3:_="">
     <xsd:import namespace="07de09e0-31b5-4a84-a978-2ff52100208d"/>
@@ -11799,36 +11860,10 @@
 </ct:contentTypeSchema>
 </file>
 
-<file path=customXml/item2.xml><?xml version="1.0" encoding="utf-8"?>
-<p:properties xmlns:p="http://schemas.microsoft.com/office/2006/metadata/properties" xmlns:xsi="http://www.w3.org/2001/XMLSchema-instance" xmlns:pc="http://schemas.microsoft.com/office/infopath/2007/PartnerControls">
-  <documentManagement/>
-</p:properties>
-</file>
-
-<file path=customXml/item3.xml><?xml version="1.0" encoding="utf-8"?>
-<?mso-contentType ?>
-<FormTemplates xmlns="http://schemas.microsoft.com/sharepoint/v3/contenttype/forms">
-  <Display>DocumentLibraryForm</Display>
-  <Edit>DocumentLibraryForm</Edit>
-  <New>DocumentLibraryForm</New>
-</FormTemplates>
-</file>
-
 <file path=customXml/itemProps1.xml><?xml version="1.0" encoding="utf-8"?>
-<ds:datastoreItem xmlns:ds="http://schemas.openxmlformats.org/officeDocument/2006/customXml" ds:itemID="{7E56D321-BAD3-422D-A440-F81935A3B294}">
+<ds:datastoreItem xmlns:ds="http://schemas.openxmlformats.org/officeDocument/2006/customXml" ds:itemID="{D4819A24-FD0A-4873-9FDC-B9C8DEC9FA8B}">
   <ds:schemaRefs>
-    <ds:schemaRef ds:uri="http://schemas.microsoft.com/office/2006/metadata/contentType"/>
-    <ds:schemaRef ds:uri="http://schemas.microsoft.com/office/2006/metadata/properties/metaAttributes"/>
-    <ds:schemaRef ds:uri="http://www.w3.org/2001/XMLSchema"/>
-    <ds:schemaRef ds:uri="http://schemas.microsoft.com/office/2006/metadata/properties"/>
-    <ds:schemaRef ds:uri="07de09e0-31b5-4a84-a978-2ff52100208d"/>
-    <ds:schemaRef ds:uri="3dadfc23-1fe6-46f5-b9b3-2c47db85b832"/>
-    <ds:schemaRef ds:uri="http://schemas.microsoft.com/office/2006/documentManagement/types"/>
-    <ds:schemaRef ds:uri="http://schemas.microsoft.com/office/infopath/2007/PartnerControls"/>
-    <ds:schemaRef ds:uri="http://schemas.openxmlformats.org/package/2006/metadata/core-properties"/>
-    <ds:schemaRef ds:uri="http://purl.org/dc/elements/1.1/"/>
-    <ds:schemaRef ds:uri="http://purl.org/dc/terms/"/>
-    <ds:schemaRef ds:uri="http://schemas.microsoft.com/internal/obd"/>
+    <ds:schemaRef ds:uri="http://schemas.microsoft.com/sharepoint/v3/contenttype/forms"/>
   </ds:schemaRefs>
 </ds:datastoreItem>
 </file>
@@ -11851,9 +11886,20 @@
 </file>
 
 <file path=customXml/itemProps3.xml><?xml version="1.0" encoding="utf-8"?>
-<ds:datastoreItem xmlns:ds="http://schemas.openxmlformats.org/officeDocument/2006/customXml" ds:itemID="{D4819A24-FD0A-4873-9FDC-B9C8DEC9FA8B}">
+<ds:datastoreItem xmlns:ds="http://schemas.openxmlformats.org/officeDocument/2006/customXml" ds:itemID="{7E56D321-BAD3-422D-A440-F81935A3B294}">
   <ds:schemaRefs>
-    <ds:schemaRef ds:uri="http://schemas.microsoft.com/sharepoint/v3/contenttype/forms"/>
+    <ds:schemaRef ds:uri="http://schemas.microsoft.com/office/2006/metadata/contentType"/>
+    <ds:schemaRef ds:uri="http://schemas.microsoft.com/office/2006/metadata/properties/metaAttributes"/>
+    <ds:schemaRef ds:uri="http://www.w3.org/2001/XMLSchema"/>
+    <ds:schemaRef ds:uri="http://schemas.microsoft.com/office/2006/metadata/properties"/>
+    <ds:schemaRef ds:uri="07de09e0-31b5-4a84-a978-2ff52100208d"/>
+    <ds:schemaRef ds:uri="3dadfc23-1fe6-46f5-b9b3-2c47db85b832"/>
+    <ds:schemaRef ds:uri="http://schemas.microsoft.com/office/2006/documentManagement/types"/>
+    <ds:schemaRef ds:uri="http://schemas.microsoft.com/office/infopath/2007/PartnerControls"/>
+    <ds:schemaRef ds:uri="http://schemas.openxmlformats.org/package/2006/metadata/core-properties"/>
+    <ds:schemaRef ds:uri="http://purl.org/dc/elements/1.1/"/>
+    <ds:schemaRef ds:uri="http://purl.org/dc/terms/"/>
+    <ds:schemaRef ds:uri="http://schemas.microsoft.com/internal/obd"/>
   </ds:schemaRefs>
 </ds:datastoreItem>
 </file>

--- a/SSE vs SignalR.pptx
+++ b/SSE vs SignalR.pptx
@@ -1082,7 +1082,18 @@
           <a:bodyPr/>
           <a:lstStyle/>
           <a:p>
-            <a:endParaRPr lang="en-US" dirty="0"/>
+            <a:r>
+              <a:rPr lang="en-US" dirty="0"/>
+              <a:t>First bullet point: with hubs, protocols, client </a:t>
+            </a:r>
+            <a:r>
+              <a:rPr lang="en-US" dirty="0" err="1"/>
+              <a:t>sdks</a:t>
+            </a:r>
+            <a:r>
+              <a:rPr lang="en-US" dirty="0"/>
+              <a:t>, connection management, and transport negotiation</a:t>
+            </a:r>
           </a:p>
         </p:txBody>
       </p:sp>
@@ -3862,7 +3873,7 @@
           <p:nvPr>
             <p:extLst>
               <p:ext uri="{D42A27DB-BD31-4B8C-83A1-F6EECF244321}">
-                <p14:modId xmlns:p14="http://schemas.microsoft.com/office/powerpoint/2010/main" val="1095321309"/>
+                <p14:modId xmlns:p14="http://schemas.microsoft.com/office/powerpoint/2010/main" val="3019746502"/>
               </p:ext>
             </p:extLst>
           </p:nvPr>
@@ -4014,7 +4025,7 @@
                     <a:p>
                       <a:r>
                         <a:rPr lang="en-US" dirty="0"/>
-                        <a:t>Multiplayer</a:t>
+                        <a:t>Multiplayer game</a:t>
                       </a:r>
                     </a:p>
                   </a:txBody>
@@ -4047,7 +4058,7 @@
                     <a:p>
                       <a:r>
                         <a:rPr lang="en-US" dirty="0"/>
-                        <a:t>Interactive </a:t>
+                        <a:t> </a:t>
                       </a:r>
                     </a:p>
                   </a:txBody>
@@ -4656,8 +4667,8 @@
         </p:nvSpPr>
         <p:spPr>
           <a:xfrm>
-            <a:off x="12477750" y="2272725"/>
-            <a:ext cx="4838700" cy="584775"/>
+            <a:off x="11601450" y="2272725"/>
+            <a:ext cx="5715000" cy="584775"/>
           </a:xfrm>
           <a:prstGeom prst="rect">
             <a:avLst/>
@@ -4673,7 +4684,7 @@
             <a:pPr algn="l"/>
             <a:r>
               <a:rPr lang="en-US" sz="3200" dirty="0"/>
-              <a:t>Feedback.. Please?</a:t>
+              <a:t>Please share your feedback</a:t>
             </a:r>
           </a:p>
         </p:txBody>
@@ -7107,7 +7118,7 @@
         </p:nvSpPr>
         <p:spPr>
           <a:xfrm>
-            <a:off x="1819275" y="3894656"/>
+            <a:off x="1819275" y="3921428"/>
             <a:ext cx="13735050" cy="584775"/>
           </a:xfrm>
           <a:prstGeom prst="rect">
@@ -7146,7 +7157,7 @@
         </p:nvSpPr>
         <p:spPr>
           <a:xfrm>
-            <a:off x="1819275" y="4840403"/>
+            <a:off x="1819275" y="4690855"/>
             <a:ext cx="13735050" cy="584775"/>
           </a:xfrm>
           <a:prstGeom prst="rect">
@@ -7185,7 +7196,7 @@
         </p:nvSpPr>
         <p:spPr>
           <a:xfrm>
-            <a:off x="1819275" y="5786150"/>
+            <a:off x="1819275" y="6356636"/>
             <a:ext cx="13735050" cy="584775"/>
           </a:xfrm>
           <a:prstGeom prst="rect">
@@ -7224,7 +7235,7 @@
         </p:nvSpPr>
         <p:spPr>
           <a:xfrm>
-            <a:off x="1819275" y="6628960"/>
+            <a:off x="1819275" y="7219510"/>
             <a:ext cx="13735050" cy="584775"/>
           </a:xfrm>
           <a:prstGeom prst="rect">
@@ -7321,6 +7332,50 @@
               <a:rPr lang="en-US" sz="1600" dirty="0"/>
               <a:t>Demo</a:t>
             </a:r>
+          </a:p>
+        </p:txBody>
+      </p:sp>
+      <p:sp>
+        <p:nvSpPr>
+          <p:cNvPr id="3" name="TextBox 2">
+            <a:extLst>
+              <a:ext uri="{FF2B5EF4-FFF2-40B4-BE49-F238E27FC236}">
+                <a16:creationId xmlns:a16="http://schemas.microsoft.com/office/drawing/2014/main" id="{04A5B1FB-E2D9-D9B5-AFA9-1CE19CBE457E}"/>
+              </a:ext>
+            </a:extLst>
+          </p:cNvPr>
+          <p:cNvSpPr txBox="1"/>
+          <p:nvPr/>
+        </p:nvSpPr>
+        <p:spPr>
+          <a:xfrm>
+            <a:off x="1819275" y="5560437"/>
+            <a:ext cx="13735050" cy="584775"/>
+          </a:xfrm>
+          <a:prstGeom prst="rect">
+            <a:avLst/>
+          </a:prstGeom>
+          <a:noFill/>
+        </p:spPr>
+        <p:txBody>
+          <a:bodyPr wrap="square" rtlCol="0">
+            <a:spAutoFit/>
+          </a:bodyPr>
+          <a:lstStyle/>
+          <a:p>
+            <a:pPr marL="285750" indent="-285750">
+              <a:buFont typeface="Arial" panose="020B0604020202020204" pitchFamily="34" charset="0"/>
+              <a:buChar char="•"/>
+            </a:pPr>
+            <a:r>
+              <a:rPr lang="en-US" sz="3200" dirty="0"/>
+              <a:t>Browser-native API based on </a:t>
+            </a:r>
+            <a:r>
+              <a:rPr lang="en-US" sz="3200" dirty="0" err="1"/>
+              <a:t>EventSource</a:t>
+            </a:r>
+            <a:endParaRPr lang="en-US" sz="3200" dirty="0"/>
           </a:p>
         </p:txBody>
       </p:sp>
@@ -7527,7 +7582,7 @@
                                           </p:stCondLst>
                                         </p:cTn>
                                         <p:tgtEl>
-                                          <p:spTgt spid="12"/>
+                                          <p:spTgt spid="3"/>
                                         </p:tgtEl>
                                         <p:attrNameLst>
                                           <p:attrName>style.visibility</p:attrName>
@@ -7541,7 +7596,7 @@
                                       <p:cBhvr>
                                         <p:cTn id="22" dur="1000" fill="hold"/>
                                         <p:tgtEl>
-                                          <p:spTgt spid="12"/>
+                                          <p:spTgt spid="3"/>
                                         </p:tgtEl>
                                         <p:attrNameLst>
                                           <p:attrName>ppt_w</p:attrName>
@@ -7564,7 +7619,7 @@
                                       <p:cBhvr>
                                         <p:cTn id="23" dur="1000" fill="hold"/>
                                         <p:tgtEl>
-                                          <p:spTgt spid="12"/>
+                                          <p:spTgt spid="3"/>
                                         </p:tgtEl>
                                         <p:attrNameLst>
                                           <p:attrName>ppt_h</p:attrName>
@@ -7587,7 +7642,7 @@
                                       <p:cBhvr>
                                         <p:cTn id="24" dur="1000" fill="hold"/>
                                         <p:tgtEl>
-                                          <p:spTgt spid="12"/>
+                                          <p:spTgt spid="3"/>
                                         </p:tgtEl>
                                         <p:attrNameLst>
                                           <p:attrName>style.rotation</p:attrName>
@@ -7610,7 +7665,7 @@
                                       <p:cBhvr>
                                         <p:cTn id="25" dur="1000"/>
                                         <p:tgtEl>
-                                          <p:spTgt spid="12"/>
+                                          <p:spTgt spid="3"/>
                                         </p:tgtEl>
                                       </p:cBhvr>
                                     </p:animEffect>
@@ -7636,7 +7691,7 @@
                             </p:stCondLst>
                             <p:childTnLst>
                               <p:par>
-                                <p:cTn id="28" presetID="53" presetClass="entr" presetSubtype="16" fill="hold" grpId="0" nodeType="clickEffect">
+                                <p:cTn id="28" presetID="31" presetClass="entr" presetSubtype="0" fill="hold" grpId="0" nodeType="clickEffect">
                                   <p:stCondLst>
                                     <p:cond delay="0"/>
                                   </p:stCondLst>
@@ -7644,6 +7699,128 @@
                                     <p:set>
                                       <p:cBhvr>
                                         <p:cTn id="29" dur="1" fill="hold">
+                                          <p:stCondLst>
+                                            <p:cond delay="0"/>
+                                          </p:stCondLst>
+                                        </p:cTn>
+                                        <p:tgtEl>
+                                          <p:spTgt spid="12"/>
+                                        </p:tgtEl>
+                                        <p:attrNameLst>
+                                          <p:attrName>style.visibility</p:attrName>
+                                        </p:attrNameLst>
+                                      </p:cBhvr>
+                                      <p:to>
+                                        <p:strVal val="visible"/>
+                                      </p:to>
+                                    </p:set>
+                                    <p:anim calcmode="lin" valueType="num">
+                                      <p:cBhvr>
+                                        <p:cTn id="30" dur="1000" fill="hold"/>
+                                        <p:tgtEl>
+                                          <p:spTgt spid="12"/>
+                                        </p:tgtEl>
+                                        <p:attrNameLst>
+                                          <p:attrName>ppt_w</p:attrName>
+                                        </p:attrNameLst>
+                                      </p:cBhvr>
+                                      <p:tavLst>
+                                        <p:tav tm="0">
+                                          <p:val>
+                                            <p:fltVal val="0"/>
+                                          </p:val>
+                                        </p:tav>
+                                        <p:tav tm="100000">
+                                          <p:val>
+                                            <p:strVal val="#ppt_w"/>
+                                          </p:val>
+                                        </p:tav>
+                                      </p:tavLst>
+                                    </p:anim>
+                                    <p:anim calcmode="lin" valueType="num">
+                                      <p:cBhvr>
+                                        <p:cTn id="31" dur="1000" fill="hold"/>
+                                        <p:tgtEl>
+                                          <p:spTgt spid="12"/>
+                                        </p:tgtEl>
+                                        <p:attrNameLst>
+                                          <p:attrName>ppt_h</p:attrName>
+                                        </p:attrNameLst>
+                                      </p:cBhvr>
+                                      <p:tavLst>
+                                        <p:tav tm="0">
+                                          <p:val>
+                                            <p:fltVal val="0"/>
+                                          </p:val>
+                                        </p:tav>
+                                        <p:tav tm="100000">
+                                          <p:val>
+                                            <p:strVal val="#ppt_h"/>
+                                          </p:val>
+                                        </p:tav>
+                                      </p:tavLst>
+                                    </p:anim>
+                                    <p:anim calcmode="lin" valueType="num">
+                                      <p:cBhvr>
+                                        <p:cTn id="32" dur="1000" fill="hold"/>
+                                        <p:tgtEl>
+                                          <p:spTgt spid="12"/>
+                                        </p:tgtEl>
+                                        <p:attrNameLst>
+                                          <p:attrName>style.rotation</p:attrName>
+                                        </p:attrNameLst>
+                                      </p:cBhvr>
+                                      <p:tavLst>
+                                        <p:tav tm="0">
+                                          <p:val>
+                                            <p:fltVal val="90"/>
+                                          </p:val>
+                                        </p:tav>
+                                        <p:tav tm="100000">
+                                          <p:val>
+                                            <p:fltVal val="0"/>
+                                          </p:val>
+                                        </p:tav>
+                                      </p:tavLst>
+                                    </p:anim>
+                                    <p:animEffect transition="in" filter="fade">
+                                      <p:cBhvr>
+                                        <p:cTn id="33" dur="1000"/>
+                                        <p:tgtEl>
+                                          <p:spTgt spid="12"/>
+                                        </p:tgtEl>
+                                      </p:cBhvr>
+                                    </p:animEffect>
+                                  </p:childTnLst>
+                                </p:cTn>
+                              </p:par>
+                            </p:childTnLst>
+                          </p:cTn>
+                        </p:par>
+                      </p:childTnLst>
+                    </p:cTn>
+                  </p:par>
+                  <p:par>
+                    <p:cTn id="34" fill="hold">
+                      <p:stCondLst>
+                        <p:cond delay="indefinite"/>
+                      </p:stCondLst>
+                      <p:childTnLst>
+                        <p:par>
+                          <p:cTn id="35" fill="hold">
+                            <p:stCondLst>
+                              <p:cond delay="0"/>
+                            </p:stCondLst>
+                            <p:childTnLst>
+                              <p:par>
+                                <p:cTn id="36" presetID="53" presetClass="entr" presetSubtype="16" fill="hold" grpId="0" nodeType="clickEffect">
+                                  <p:stCondLst>
+                                    <p:cond delay="0"/>
+                                  </p:stCondLst>
+                                  <p:childTnLst>
+                                    <p:set>
+                                      <p:cBhvr>
+                                        <p:cTn id="37" dur="1" fill="hold">
                                           <p:stCondLst>
                                             <p:cond delay="0"/>
                                           </p:stCondLst>
@@ -7661,7 +7838,7 @@
                                     </p:set>
                                     <p:anim calcmode="lin" valueType="num">
                                       <p:cBhvr>
-                                        <p:cTn id="30" dur="500" fill="hold"/>
+                                        <p:cTn id="38" dur="500" fill="hold"/>
                                         <p:tgtEl>
                                           <p:spTgt spid="17"/>
                                         </p:tgtEl>
@@ -7684,7 +7861,7 @@
                                     </p:anim>
                                     <p:anim calcmode="lin" valueType="num">
                                       <p:cBhvr>
-                                        <p:cTn id="31" dur="500" fill="hold"/>
+                                        <p:cTn id="39" dur="500" fill="hold"/>
                                         <p:tgtEl>
                                           <p:spTgt spid="17"/>
                                         </p:tgtEl>
@@ -7707,7 +7884,7 @@
                                     </p:anim>
                                     <p:animEffect transition="in" filter="fade">
                                       <p:cBhvr>
-                                        <p:cTn id="32" dur="500"/>
+                                        <p:cTn id="40" dur="500"/>
                                         <p:tgtEl>
                                           <p:spTgt spid="17"/>
                                         </p:tgtEl>
@@ -7749,6 +7926,7 @@
       <p:bldP spid="12" grpId="0"/>
       <p:bldP spid="17" grpId="0"/>
       <p:bldP spid="5" grpId="0"/>
+      <p:bldP spid="3" grpId="0"/>
     </p:bldLst>
   </p:timing>
 </p:sld>
@@ -7872,7 +8050,7 @@
           </a:bodyPr>
           <a:lstStyle/>
           <a:p>
-            <a:pPr marL="285750" indent="-285750" algn="l">
+            <a:pPr marL="285750" indent="-285750">
               <a:buFont typeface="Arial" panose="020B0604020202020204" pitchFamily="34" charset="0"/>
               <a:buChar char="•"/>
             </a:pPr>
@@ -7882,12 +8060,9 @@
             </a:r>
             <a:r>
               <a:rPr lang="en-US" sz="3200" dirty="0" err="1"/>
-              <a:t>ServerSentEvents</a:t>
+              <a:t>TypedResults.ServerSentEvents</a:t>
             </a:r>
-            <a:r>
-              <a:rPr lang="en-US" sz="3200" dirty="0"/>
-              <a:t> result. </a:t>
-            </a:r>
+            <a:endParaRPr lang="en-US" sz="3200" dirty="0"/>
           </a:p>
         </p:txBody>
       </p:sp>
@@ -7906,7 +8081,7 @@
           <p:nvPr>
             <p:extLst>
               <p:ext uri="{D42A27DB-BD31-4B8C-83A1-F6EECF244321}">
-                <p14:modId xmlns:p14="http://schemas.microsoft.com/office/powerpoint/2010/main" val="1993087378"/>
+                <p14:modId xmlns:p14="http://schemas.microsoft.com/office/powerpoint/2010/main" val="2487613826"/>
               </p:ext>
             </p:extLst>
           </p:nvPr>
@@ -8484,8 +8659,12 @@
                     <a:lstStyle/>
                     <a:p>
                       <a:r>
+                        <a:rPr lang="en-US" dirty="0" err="1"/>
+                        <a:t>EventId</a:t>
+                      </a:r>
+                      <a:r>
                         <a:rPr lang="en-US" dirty="0"/>
-                        <a:t>eventide property</a:t>
+                        <a:t> property</a:t>
                       </a:r>
                     </a:p>
                   </a:txBody>
@@ -8540,7 +8719,7 @@
                     <a:p>
                       <a:r>
                         <a:rPr lang="en-US" dirty="0" err="1"/>
-                        <a:t>reconnectionInterval</a:t>
+                        <a:t>ReconnectionInterval</a:t>
                       </a:r>
                       <a:r>
                         <a:rPr lang="en-US" dirty="0"/>
@@ -9176,7 +9355,7 @@
             </a:pPr>
             <a:r>
               <a:rPr lang="en-US" sz="3200" dirty="0"/>
-              <a:t>ASP.NET Core Open-source library</a:t>
+              <a:t>ASP.NET Core Open-source library, real-time framework</a:t>
             </a:r>
           </a:p>
         </p:txBody>
@@ -11669,21 +11848,6 @@
 </file>
 
 <file path=customXml/item1.xml><?xml version="1.0" encoding="utf-8"?>
-<?mso-contentType ?>
-<FormTemplates xmlns="http://schemas.microsoft.com/sharepoint/v3/contenttype/forms">
-  <Display>DocumentLibraryForm</Display>
-  <Edit>DocumentLibraryForm</Edit>
-  <New>DocumentLibraryForm</New>
-</FormTemplates>
-</file>
-
-<file path=customXml/item2.xml><?xml version="1.0" encoding="utf-8"?>
-<p:properties xmlns:p="http://schemas.microsoft.com/office/2006/metadata/properties" xmlns:xsi="http://www.w3.org/2001/XMLSchema-instance" xmlns:pc="http://schemas.microsoft.com/office/infopath/2007/PartnerControls">
-  <documentManagement/>
-</p:properties>
-</file>
-
-<file path=customXml/item3.xml><?xml version="1.0" encoding="utf-8"?>
 <ct:contentTypeSchema xmlns:ct="http://schemas.microsoft.com/office/2006/metadata/contentType" xmlns:ma="http://schemas.microsoft.com/office/2006/metadata/properties/metaAttributes" ct:_="" ma:_="" ma:contentTypeName="Document" ma:contentTypeID="0x010100B1EDA3959F5652479FD22C0F2500B83D" ma:contentTypeVersion="6" ma:contentTypeDescription="Een nieuw document maken." ma:contentTypeScope="" ma:versionID="b2766be02785903ad09cd51475cb1dc1">
   <xsd:schema xmlns:xsd="http://www.w3.org/2001/XMLSchema" xmlns:xs="http://www.w3.org/2001/XMLSchema" xmlns:p="http://schemas.microsoft.com/office/2006/metadata/properties" xmlns:ns2="07de09e0-31b5-4a84-a978-2ff52100208d" xmlns:ns3="3dadfc23-1fe6-46f5-b9b3-2c47db85b832" targetNamespace="http://schemas.microsoft.com/office/2006/metadata/properties" ma:root="true" ma:fieldsID="ca2aac55a5561dc83b4c6d505b892845" ns2:_="" ns3:_="">
     <xsd:import namespace="07de09e0-31b5-4a84-a978-2ff52100208d"/>
@@ -11860,32 +12024,22 @@
 </ct:contentTypeSchema>
 </file>
 
-<file path=customXml/itemProps1.xml><?xml version="1.0" encoding="utf-8"?>
-<ds:datastoreItem xmlns:ds="http://schemas.openxmlformats.org/officeDocument/2006/customXml" ds:itemID="{D4819A24-FD0A-4873-9FDC-B9C8DEC9FA8B}">
-  <ds:schemaRefs>
-    <ds:schemaRef ds:uri="http://schemas.microsoft.com/sharepoint/v3/contenttype/forms"/>
-  </ds:schemaRefs>
-</ds:datastoreItem>
+<file path=customXml/item2.xml><?xml version="1.0" encoding="utf-8"?>
+<p:properties xmlns:p="http://schemas.microsoft.com/office/2006/metadata/properties" xmlns:xsi="http://www.w3.org/2001/XMLSchema-instance" xmlns:pc="http://schemas.microsoft.com/office/infopath/2007/PartnerControls">
+  <documentManagement/>
+</p:properties>
 </file>
 
-<file path=customXml/itemProps2.xml><?xml version="1.0" encoding="utf-8"?>
-<ds:datastoreItem xmlns:ds="http://schemas.openxmlformats.org/officeDocument/2006/customXml" ds:itemID="{1178E873-92C9-406A-8507-D2C894A91B27}">
-  <ds:schemaRefs>
-    <ds:schemaRef ds:uri="http://purl.org/dc/dcmitype/"/>
-    <ds:schemaRef ds:uri="http://schemas.microsoft.com/office/2006/documentManagement/types"/>
-    <ds:schemaRef ds:uri="http://schemas.microsoft.com/office/infopath/2007/PartnerControls"/>
-    <ds:schemaRef ds:uri="http://schemas.microsoft.com/office/2006/metadata/properties"/>
-    <ds:schemaRef ds:uri="http://www.w3.org/XML/1998/namespace"/>
-    <ds:schemaRef ds:uri="http://purl.org/dc/terms/"/>
-    <ds:schemaRef ds:uri="http://purl.org/dc/elements/1.1/"/>
-    <ds:schemaRef ds:uri="http://schemas.openxmlformats.org/package/2006/metadata/core-properties"/>
-    <ds:schemaRef ds:uri="3dadfc23-1fe6-46f5-b9b3-2c47db85b832"/>
-    <ds:schemaRef ds:uri="07de09e0-31b5-4a84-a978-2ff52100208d"/>
-  </ds:schemaRefs>
-</ds:datastoreItem>
+<file path=customXml/item3.xml><?xml version="1.0" encoding="utf-8"?>
+<?mso-contentType ?>
+<FormTemplates xmlns="http://schemas.microsoft.com/sharepoint/v3/contenttype/forms">
+  <Display>DocumentLibraryForm</Display>
+  <Edit>DocumentLibraryForm</Edit>
+  <New>DocumentLibraryForm</New>
+</FormTemplates>
 </file>
 
-<file path=customXml/itemProps3.xml><?xml version="1.0" encoding="utf-8"?>
+<file path=customXml/itemProps1.xml><?xml version="1.0" encoding="utf-8"?>
 <ds:datastoreItem xmlns:ds="http://schemas.openxmlformats.org/officeDocument/2006/customXml" ds:itemID="{7E56D321-BAD3-422D-A440-F81935A3B294}">
   <ds:schemaRefs>
     <ds:schemaRef ds:uri="http://schemas.microsoft.com/office/2006/metadata/contentType"/>
@@ -11904,6 +12058,31 @@
 </ds:datastoreItem>
 </file>
 
+<file path=customXml/itemProps2.xml><?xml version="1.0" encoding="utf-8"?>
+<ds:datastoreItem xmlns:ds="http://schemas.openxmlformats.org/officeDocument/2006/customXml" ds:itemID="{1178E873-92C9-406A-8507-D2C894A91B27}">
+  <ds:schemaRefs>
+    <ds:schemaRef ds:uri="http://schemas.microsoft.com/office/2006/documentManagement/types"/>
+    <ds:schemaRef ds:uri="http://schemas.microsoft.com/office/infopath/2007/PartnerControls"/>
+    <ds:schemaRef ds:uri="http://purl.org/dc/elements/1.1/"/>
+    <ds:schemaRef ds:uri="http://schemas.microsoft.com/office/2006/metadata/properties"/>
+    <ds:schemaRef ds:uri="3dadfc23-1fe6-46f5-b9b3-2c47db85b832"/>
+    <ds:schemaRef ds:uri="http://purl.org/dc/terms/"/>
+    <ds:schemaRef ds:uri="07de09e0-31b5-4a84-a978-2ff52100208d"/>
+    <ds:schemaRef ds:uri="http://schemas.openxmlformats.org/package/2006/metadata/core-properties"/>
+    <ds:schemaRef ds:uri="http://www.w3.org/XML/1998/namespace"/>
+    <ds:schemaRef ds:uri="http://purl.org/dc/dcmitype/"/>
+  </ds:schemaRefs>
+</ds:datastoreItem>
+</file>
+
+<file path=customXml/itemProps3.xml><?xml version="1.0" encoding="utf-8"?>
+<ds:datastoreItem xmlns:ds="http://schemas.openxmlformats.org/officeDocument/2006/customXml" ds:itemID="{D4819A24-FD0A-4873-9FDC-B9C8DEC9FA8B}">
+  <ds:schemaRefs>
+    <ds:schemaRef ds:uri="http://schemas.microsoft.com/sharepoint/v3/contenttype/forms"/>
+  </ds:schemaRefs>
+</ds:datastoreItem>
+</file>
+
 <file path=docMetadata/LabelInfo.xml><?xml version="1.0" encoding="utf-8"?>
 <clbl:labelList xmlns:clbl="http://schemas.microsoft.com/office/2020/mipLabelMetadata">
   <clbl:label id="{0a9b9e15-83d2-4075-9282-a04e05c6580a}" enabled="1" method="Standard" siteId="{24139d14-c62c-4c47-8bdd-ce71ea1d50cf}" contentBits="0" removed="0"/>

--- a/SSE vs SignalR.pptx
+++ b/SSE vs SignalR.pptx
@@ -5,7 +5,7 @@
     <p:sldMasterId id="2147483648" r:id="rId4"/>
   </p:sldMasterIdLst>
   <p:notesMasterIdLst>
-    <p:notesMasterId r:id="rId17"/>
+    <p:notesMasterId r:id="rId19"/>
   </p:notesMasterIdLst>
   <p:sldIdLst>
     <p:sldId id="256" r:id="rId5"/>
@@ -16,29 +16,31 @@
     <p:sldId id="261" r:id="rId10"/>
     <p:sldId id="262" r:id="rId11"/>
     <p:sldId id="263" r:id="rId12"/>
-    <p:sldId id="264" r:id="rId13"/>
-    <p:sldId id="265" r:id="rId14"/>
-    <p:sldId id="266" r:id="rId15"/>
-    <p:sldId id="267" r:id="rId16"/>
+    <p:sldId id="268" r:id="rId13"/>
+    <p:sldId id="269" r:id="rId14"/>
+    <p:sldId id="264" r:id="rId15"/>
+    <p:sldId id="265" r:id="rId16"/>
+    <p:sldId id="266" r:id="rId17"/>
+    <p:sldId id="267" r:id="rId18"/>
   </p:sldIdLst>
   <p:sldSz cx="18288000" cy="10287000"/>
   <p:notesSz cx="6858000" cy="9144000"/>
   <p:embeddedFontLst>
     <p:embeddedFont>
       <p:font typeface="Karla" pitchFamily="2" charset="0"/>
-      <p:regular r:id="rId18"/>
+      <p:regular r:id="rId20"/>
     </p:embeddedFont>
     <p:embeddedFont>
       <p:font typeface="Karla Light" pitchFamily="2" charset="0"/>
-      <p:regular r:id="rId19"/>
+      <p:regular r:id="rId21"/>
     </p:embeddedFont>
     <p:embeddedFont>
       <p:font typeface="Karla Medium" pitchFamily="2" charset="0"/>
-      <p:regular r:id="rId20"/>
+      <p:regular r:id="rId22"/>
     </p:embeddedFont>
     <p:embeddedFont>
       <p:font typeface="Montserrat SemiBold" panose="00000700000000000000" pitchFamily="2" charset="0"/>
-      <p:bold r:id="rId21"/>
+      <p:bold r:id="rId23"/>
     </p:embeddedFont>
   </p:embeddedFontLst>
   <p:defaultTextStyle>
@@ -239,7 +241,7 @@
           <a:p>
             <a:fld id="{7FA1223C-D946-48A3-AE59-BDFF8BA92F9C}" type="datetimeFigureOut">
               <a:rPr lang="en-US" smtClean="0"/>
-              <a:t>9/18/2026</a:t>
+              <a:t>19-09-26</a:t>
             </a:fld>
             <a:endParaRPr lang="en-US"/>
           </a:p>
@@ -606,6 +608,240 @@
   <p:cSld>
     <p:spTree>
       <p:nvGrpSpPr>
+        <p:cNvPr id="1" name="">
+          <a:extLst>
+            <a:ext uri="{FF2B5EF4-FFF2-40B4-BE49-F238E27FC236}">
+              <a16:creationId xmlns:a16="http://schemas.microsoft.com/office/drawing/2014/main" id="{40805F28-CBC9-BBD3-38BA-7EC0F74E2F8B}"/>
+            </a:ext>
+          </a:extLst>
+        </p:cNvPr>
+        <p:cNvGrpSpPr/>
+        <p:nvPr/>
+      </p:nvGrpSpPr>
+      <p:grpSpPr>
+        <a:xfrm>
+          <a:off x="0" y="0"/>
+          <a:ext cx="0" cy="0"/>
+          <a:chOff x="0" y="0"/>
+          <a:chExt cx="0" cy="0"/>
+        </a:xfrm>
+      </p:grpSpPr>
+      <p:sp>
+        <p:nvSpPr>
+          <p:cNvPr id="2" name="Slide Image Placeholder 1">
+            <a:extLst>
+              <a:ext uri="{FF2B5EF4-FFF2-40B4-BE49-F238E27FC236}">
+                <a16:creationId xmlns:a16="http://schemas.microsoft.com/office/drawing/2014/main" id="{86CB047B-DA27-E867-0380-BDF47D6575A4}"/>
+              </a:ext>
+            </a:extLst>
+          </p:cNvPr>
+          <p:cNvSpPr>
+            <a:spLocks noGrp="1" noRot="1" noChangeAspect="1"/>
+          </p:cNvSpPr>
+          <p:nvPr>
+            <p:ph type="sldImg"/>
+          </p:nvPr>
+        </p:nvSpPr>
+        <p:spPr/>
+      </p:sp>
+      <p:sp>
+        <p:nvSpPr>
+          <p:cNvPr id="3" name="Notes Placeholder 2">
+            <a:extLst>
+              <a:ext uri="{FF2B5EF4-FFF2-40B4-BE49-F238E27FC236}">
+                <a16:creationId xmlns:a16="http://schemas.microsoft.com/office/drawing/2014/main" id="{58AB33BB-3511-DB12-E8D6-4FFE43AC72ED}"/>
+              </a:ext>
+            </a:extLst>
+          </p:cNvPr>
+          <p:cNvSpPr>
+            <a:spLocks noGrp="1"/>
+          </p:cNvSpPr>
+          <p:nvPr>
+            <p:ph type="body" idx="1"/>
+          </p:nvPr>
+        </p:nvSpPr>
+        <p:spPr/>
+        <p:txBody>
+          <a:bodyPr/>
+          <a:lstStyle/>
+          <a:p>
+            <a:endParaRPr lang="en-US" dirty="0"/>
+          </a:p>
+        </p:txBody>
+      </p:sp>
+      <p:sp>
+        <p:nvSpPr>
+          <p:cNvPr id="4" name="Slide Number Placeholder 3">
+            <a:extLst>
+              <a:ext uri="{FF2B5EF4-FFF2-40B4-BE49-F238E27FC236}">
+                <a16:creationId xmlns:a16="http://schemas.microsoft.com/office/drawing/2014/main" id="{69C902DD-E792-5A54-9BE7-A5CB58E67D61}"/>
+              </a:ext>
+            </a:extLst>
+          </p:cNvPr>
+          <p:cNvSpPr>
+            <a:spLocks noGrp="1"/>
+          </p:cNvSpPr>
+          <p:nvPr>
+            <p:ph type="sldNum" sz="quarter" idx="5"/>
+          </p:nvPr>
+        </p:nvSpPr>
+        <p:spPr/>
+        <p:txBody>
+          <a:bodyPr/>
+          <a:lstStyle/>
+          <a:p>
+            <a:fld id="{CCE09C32-A7D4-43E3-99E7-EFFD3BF61665}" type="slidenum">
+              <a:rPr lang="en-US" smtClean="0"/>
+              <a:t>12</a:t>
+            </a:fld>
+            <a:endParaRPr lang="en-US"/>
+          </a:p>
+        </p:txBody>
+      </p:sp>
+    </p:spTree>
+    <p:extLst>
+      <p:ext uri="{BB962C8B-B14F-4D97-AF65-F5344CB8AC3E}">
+        <p14:creationId xmlns:p14="http://schemas.microsoft.com/office/powerpoint/2010/main" val="3559407515"/>
+      </p:ext>
+    </p:extLst>
+  </p:cSld>
+  <p:clrMapOvr>
+    <a:masterClrMapping/>
+  </p:clrMapOvr>
+</p:notes>
+</file>
+
+<file path=ppt/notesSlides/notesSlide11.xml><?xml version="1.0" encoding="utf-8"?>
+<p:notes xmlns:a="http://schemas.openxmlformats.org/drawingml/2006/main" xmlns:r="http://schemas.openxmlformats.org/officeDocument/2006/relationships" xmlns:p="http://schemas.openxmlformats.org/presentationml/2006/main">
+  <p:cSld>
+    <p:spTree>
+      <p:nvGrpSpPr>
+        <p:cNvPr id="1" name="">
+          <a:extLst>
+            <a:ext uri="{FF2B5EF4-FFF2-40B4-BE49-F238E27FC236}">
+              <a16:creationId xmlns:a16="http://schemas.microsoft.com/office/drawing/2014/main" id="{6BE54475-0BC7-DB15-388A-0D2D5457C4CA}"/>
+            </a:ext>
+          </a:extLst>
+        </p:cNvPr>
+        <p:cNvGrpSpPr/>
+        <p:nvPr/>
+      </p:nvGrpSpPr>
+      <p:grpSpPr>
+        <a:xfrm>
+          <a:off x="0" y="0"/>
+          <a:ext cx="0" cy="0"/>
+          <a:chOff x="0" y="0"/>
+          <a:chExt cx="0" cy="0"/>
+        </a:xfrm>
+      </p:grpSpPr>
+      <p:sp>
+        <p:nvSpPr>
+          <p:cNvPr id="2" name="Slide Image Placeholder 1">
+            <a:extLst>
+              <a:ext uri="{FF2B5EF4-FFF2-40B4-BE49-F238E27FC236}">
+                <a16:creationId xmlns:a16="http://schemas.microsoft.com/office/drawing/2014/main" id="{669CEC4D-A2AF-6870-BE8A-7B211A28A503}"/>
+              </a:ext>
+            </a:extLst>
+          </p:cNvPr>
+          <p:cNvSpPr>
+            <a:spLocks noGrp="1" noRot="1" noChangeAspect="1"/>
+          </p:cNvSpPr>
+          <p:nvPr>
+            <p:ph type="sldImg"/>
+          </p:nvPr>
+        </p:nvSpPr>
+        <p:spPr/>
+      </p:sp>
+      <p:sp>
+        <p:nvSpPr>
+          <p:cNvPr id="3" name="Notes Placeholder 2">
+            <a:extLst>
+              <a:ext uri="{FF2B5EF4-FFF2-40B4-BE49-F238E27FC236}">
+                <a16:creationId xmlns:a16="http://schemas.microsoft.com/office/drawing/2014/main" id="{8A560737-AE9B-C570-F531-9888286DCA4D}"/>
+              </a:ext>
+            </a:extLst>
+          </p:cNvPr>
+          <p:cNvSpPr>
+            <a:spLocks noGrp="1"/>
+          </p:cNvSpPr>
+          <p:nvPr>
+            <p:ph type="body" idx="1"/>
+          </p:nvPr>
+        </p:nvSpPr>
+        <p:spPr/>
+        <p:txBody>
+          <a:bodyPr/>
+          <a:lstStyle/>
+          <a:p>
+            <a:r>
+              <a:rPr lang="en-US" dirty="0"/>
+              <a:t>- If all I need is for my server to continuously tell the browser something happened, I don't necessarily need </a:t>
+            </a:r>
+            <a:r>
+              <a:rPr lang="en-US" dirty="0" err="1"/>
+              <a:t>SignalR</a:t>
+            </a:r>
+            <a:r>
+              <a:rPr lang="en-US" dirty="0"/>
+              <a:t>.</a:t>
+            </a:r>
+            <a:br>
+              <a:rPr lang="en-US" dirty="0"/>
+            </a:br>
+            <a:r>
+              <a:rPr lang="en-US" dirty="0"/>
+              <a:t>- </a:t>
+            </a:r>
+          </a:p>
+        </p:txBody>
+      </p:sp>
+      <p:sp>
+        <p:nvSpPr>
+          <p:cNvPr id="4" name="Slide Number Placeholder 3">
+            <a:extLst>
+              <a:ext uri="{FF2B5EF4-FFF2-40B4-BE49-F238E27FC236}">
+                <a16:creationId xmlns:a16="http://schemas.microsoft.com/office/drawing/2014/main" id="{F37C3F09-F97C-C4F9-3C28-5FD6FA2334A9}"/>
+              </a:ext>
+            </a:extLst>
+          </p:cNvPr>
+          <p:cNvSpPr>
+            <a:spLocks noGrp="1"/>
+          </p:cNvSpPr>
+          <p:nvPr>
+            <p:ph type="sldNum" sz="quarter" idx="5"/>
+          </p:nvPr>
+        </p:nvSpPr>
+        <p:spPr/>
+        <p:txBody>
+          <a:bodyPr/>
+          <a:lstStyle/>
+          <a:p>
+            <a:fld id="{CCE09C32-A7D4-43E3-99E7-EFFD3BF61665}" type="slidenum">
+              <a:rPr lang="en-US" smtClean="0"/>
+              <a:t>13</a:t>
+            </a:fld>
+            <a:endParaRPr lang="en-US"/>
+          </a:p>
+        </p:txBody>
+      </p:sp>
+    </p:spTree>
+    <p:extLst>
+      <p:ext uri="{BB962C8B-B14F-4D97-AF65-F5344CB8AC3E}">
+        <p14:creationId xmlns:p14="http://schemas.microsoft.com/office/powerpoint/2010/main" val="3970970653"/>
+      </p:ext>
+    </p:extLst>
+  </p:cSld>
+  <p:clrMapOvr>
+    <a:masterClrMapping/>
+  </p:clrMapOvr>
+</p:notes>
+</file>
+
+<file path=ppt/notesSlides/notesSlide12.xml><?xml version="1.0" encoding="utf-8"?>
+<p:notes xmlns:a="http://schemas.openxmlformats.org/drawingml/2006/main" xmlns:r="http://schemas.openxmlformats.org/officeDocument/2006/relationships" xmlns:p="http://schemas.openxmlformats.org/presentationml/2006/main">
+  <p:cSld>
+    <p:spTree>
+      <p:nvGrpSpPr>
         <p:cNvPr id="1" name=""/>
         <p:cNvGrpSpPr/>
         <p:nvPr/>
@@ -666,7 +902,7 @@
           <a:p>
             <a:fld id="{CCE09C32-A7D4-43E3-99E7-EFFD3BF61665}" type="slidenum">
               <a:rPr lang="en-US" smtClean="0"/>
-              <a:t>12</a:t>
+              <a:t>14</a:t>
             </a:fld>
             <a:endParaRPr lang="en-US"/>
           </a:p>
@@ -1255,6 +1491,222 @@
         <p:cNvPr id="1" name="">
           <a:extLst>
             <a:ext uri="{FF2B5EF4-FFF2-40B4-BE49-F238E27FC236}">
+              <a16:creationId xmlns:a16="http://schemas.microsoft.com/office/drawing/2014/main" id="{4C56FBD4-F772-7AE7-255B-B2CC85F92BB3}"/>
+            </a:ext>
+          </a:extLst>
+        </p:cNvPr>
+        <p:cNvGrpSpPr/>
+        <p:nvPr/>
+      </p:nvGrpSpPr>
+      <p:grpSpPr>
+        <a:xfrm>
+          <a:off x="0" y="0"/>
+          <a:ext cx="0" cy="0"/>
+          <a:chOff x="0" y="0"/>
+          <a:chExt cx="0" cy="0"/>
+        </a:xfrm>
+      </p:grpSpPr>
+      <p:sp>
+        <p:nvSpPr>
+          <p:cNvPr id="2" name="Slide Image Placeholder 1">
+            <a:extLst>
+              <a:ext uri="{FF2B5EF4-FFF2-40B4-BE49-F238E27FC236}">
+                <a16:creationId xmlns:a16="http://schemas.microsoft.com/office/drawing/2014/main" id="{0F9C4DD5-80F8-ADE6-23E0-D105D7DDBA8C}"/>
+              </a:ext>
+            </a:extLst>
+          </p:cNvPr>
+          <p:cNvSpPr>
+            <a:spLocks noGrp="1" noRot="1" noChangeAspect="1"/>
+          </p:cNvSpPr>
+          <p:nvPr>
+            <p:ph type="sldImg"/>
+          </p:nvPr>
+        </p:nvSpPr>
+        <p:spPr/>
+      </p:sp>
+      <p:sp>
+        <p:nvSpPr>
+          <p:cNvPr id="3" name="Notes Placeholder 2">
+            <a:extLst>
+              <a:ext uri="{FF2B5EF4-FFF2-40B4-BE49-F238E27FC236}">
+                <a16:creationId xmlns:a16="http://schemas.microsoft.com/office/drawing/2014/main" id="{7100DA65-9772-FFFC-77E4-AB7A9561461C}"/>
+              </a:ext>
+            </a:extLst>
+          </p:cNvPr>
+          <p:cNvSpPr>
+            <a:spLocks noGrp="1"/>
+          </p:cNvSpPr>
+          <p:nvPr>
+            <p:ph type="body" idx="1"/>
+          </p:nvPr>
+        </p:nvSpPr>
+        <p:spPr/>
+        <p:txBody>
+          <a:bodyPr/>
+          <a:lstStyle/>
+          <a:p>
+            <a:endParaRPr lang="en-US" dirty="0"/>
+          </a:p>
+        </p:txBody>
+      </p:sp>
+      <p:sp>
+        <p:nvSpPr>
+          <p:cNvPr id="4" name="Slide Number Placeholder 3">
+            <a:extLst>
+              <a:ext uri="{FF2B5EF4-FFF2-40B4-BE49-F238E27FC236}">
+                <a16:creationId xmlns:a16="http://schemas.microsoft.com/office/drawing/2014/main" id="{67441D14-B211-A8F4-1BC9-6421595730B8}"/>
+              </a:ext>
+            </a:extLst>
+          </p:cNvPr>
+          <p:cNvSpPr>
+            <a:spLocks noGrp="1"/>
+          </p:cNvSpPr>
+          <p:nvPr>
+            <p:ph type="sldNum" sz="quarter" idx="5"/>
+          </p:nvPr>
+        </p:nvSpPr>
+        <p:spPr/>
+        <p:txBody>
+          <a:bodyPr/>
+          <a:lstStyle/>
+          <a:p>
+            <a:fld id="{CCE09C32-A7D4-43E3-99E7-EFFD3BF61665}" type="slidenum">
+              <a:rPr lang="en-US" smtClean="0"/>
+              <a:t>9</a:t>
+            </a:fld>
+            <a:endParaRPr lang="en-US"/>
+          </a:p>
+        </p:txBody>
+      </p:sp>
+    </p:spTree>
+    <p:extLst>
+      <p:ext uri="{BB962C8B-B14F-4D97-AF65-F5344CB8AC3E}">
+        <p14:creationId xmlns:p14="http://schemas.microsoft.com/office/powerpoint/2010/main" val="56809964"/>
+      </p:ext>
+    </p:extLst>
+  </p:cSld>
+  <p:clrMapOvr>
+    <a:masterClrMapping/>
+  </p:clrMapOvr>
+</p:notes>
+</file>
+
+<file path=ppt/notesSlides/notesSlide8.xml><?xml version="1.0" encoding="utf-8"?>
+<p:notes xmlns:a="http://schemas.openxmlformats.org/drawingml/2006/main" xmlns:r="http://schemas.openxmlformats.org/officeDocument/2006/relationships" xmlns:p="http://schemas.openxmlformats.org/presentationml/2006/main">
+  <p:cSld>
+    <p:spTree>
+      <p:nvGrpSpPr>
+        <p:cNvPr id="1" name="">
+          <a:extLst>
+            <a:ext uri="{FF2B5EF4-FFF2-40B4-BE49-F238E27FC236}">
+              <a16:creationId xmlns:a16="http://schemas.microsoft.com/office/drawing/2014/main" id="{7B49A9D1-E6CF-AE4F-B93A-2B72242DCCB4}"/>
+            </a:ext>
+          </a:extLst>
+        </p:cNvPr>
+        <p:cNvGrpSpPr/>
+        <p:nvPr/>
+      </p:nvGrpSpPr>
+      <p:grpSpPr>
+        <a:xfrm>
+          <a:off x="0" y="0"/>
+          <a:ext cx="0" cy="0"/>
+          <a:chOff x="0" y="0"/>
+          <a:chExt cx="0" cy="0"/>
+        </a:xfrm>
+      </p:grpSpPr>
+      <p:sp>
+        <p:nvSpPr>
+          <p:cNvPr id="2" name="Slide Image Placeholder 1">
+            <a:extLst>
+              <a:ext uri="{FF2B5EF4-FFF2-40B4-BE49-F238E27FC236}">
+                <a16:creationId xmlns:a16="http://schemas.microsoft.com/office/drawing/2014/main" id="{9AB79D85-5B14-F6FC-07AE-6A7850B6099F}"/>
+              </a:ext>
+            </a:extLst>
+          </p:cNvPr>
+          <p:cNvSpPr>
+            <a:spLocks noGrp="1" noRot="1" noChangeAspect="1"/>
+          </p:cNvSpPr>
+          <p:nvPr>
+            <p:ph type="sldImg"/>
+          </p:nvPr>
+        </p:nvSpPr>
+        <p:spPr/>
+      </p:sp>
+      <p:sp>
+        <p:nvSpPr>
+          <p:cNvPr id="3" name="Notes Placeholder 2">
+            <a:extLst>
+              <a:ext uri="{FF2B5EF4-FFF2-40B4-BE49-F238E27FC236}">
+                <a16:creationId xmlns:a16="http://schemas.microsoft.com/office/drawing/2014/main" id="{927A44B7-5CBB-1CAC-16B3-5C27F239FC6B}"/>
+              </a:ext>
+            </a:extLst>
+          </p:cNvPr>
+          <p:cNvSpPr>
+            <a:spLocks noGrp="1"/>
+          </p:cNvSpPr>
+          <p:nvPr>
+            <p:ph type="body" idx="1"/>
+          </p:nvPr>
+        </p:nvSpPr>
+        <p:spPr/>
+        <p:txBody>
+          <a:bodyPr/>
+          <a:lstStyle/>
+          <a:p>
+            <a:endParaRPr lang="en-US" dirty="0"/>
+          </a:p>
+        </p:txBody>
+      </p:sp>
+      <p:sp>
+        <p:nvSpPr>
+          <p:cNvPr id="4" name="Slide Number Placeholder 3">
+            <a:extLst>
+              <a:ext uri="{FF2B5EF4-FFF2-40B4-BE49-F238E27FC236}">
+                <a16:creationId xmlns:a16="http://schemas.microsoft.com/office/drawing/2014/main" id="{56E5EDAF-B699-0F43-36AB-7F34D7CA58B8}"/>
+              </a:ext>
+            </a:extLst>
+          </p:cNvPr>
+          <p:cNvSpPr>
+            <a:spLocks noGrp="1"/>
+          </p:cNvSpPr>
+          <p:nvPr>
+            <p:ph type="sldNum" sz="quarter" idx="5"/>
+          </p:nvPr>
+        </p:nvSpPr>
+        <p:spPr/>
+        <p:txBody>
+          <a:bodyPr/>
+          <a:lstStyle/>
+          <a:p>
+            <a:fld id="{CCE09C32-A7D4-43E3-99E7-EFFD3BF61665}" type="slidenum">
+              <a:rPr lang="en-US" smtClean="0"/>
+              <a:t>10</a:t>
+            </a:fld>
+            <a:endParaRPr lang="en-US"/>
+          </a:p>
+        </p:txBody>
+      </p:sp>
+    </p:spTree>
+    <p:extLst>
+      <p:ext uri="{BB962C8B-B14F-4D97-AF65-F5344CB8AC3E}">
+        <p14:creationId xmlns:p14="http://schemas.microsoft.com/office/powerpoint/2010/main" val="3303290501"/>
+      </p:ext>
+    </p:extLst>
+  </p:cSld>
+  <p:clrMapOvr>
+    <a:masterClrMapping/>
+  </p:clrMapOvr>
+</p:notes>
+</file>
+
+<file path=ppt/notesSlides/notesSlide9.xml><?xml version="1.0" encoding="utf-8"?>
+<p:notes xmlns:a="http://schemas.openxmlformats.org/drawingml/2006/main" xmlns:r="http://schemas.openxmlformats.org/officeDocument/2006/relationships" xmlns:p="http://schemas.openxmlformats.org/presentationml/2006/main">
+  <p:cSld>
+    <p:spTree>
+      <p:nvGrpSpPr>
+        <p:cNvPr id="1" name="">
+          <a:extLst>
+            <a:ext uri="{FF2B5EF4-FFF2-40B4-BE49-F238E27FC236}">
               <a16:creationId xmlns:a16="http://schemas.microsoft.com/office/drawing/2014/main" id="{06913FB9-5DCB-A5E6-7A73-1D3C5653378A}"/>
             </a:ext>
           </a:extLst>
@@ -1336,7 +1788,7 @@
           <a:p>
             <a:fld id="{CCE09C32-A7D4-43E3-99E7-EFFD3BF61665}" type="slidenum">
               <a:rPr lang="en-US" smtClean="0"/>
-              <a:t>9</a:t>
+              <a:t>11</a:t>
             </a:fld>
             <a:endParaRPr lang="en-US"/>
           </a:p>
@@ -1346,240 +1798,6 @@
     <p:extLst>
       <p:ext uri="{BB962C8B-B14F-4D97-AF65-F5344CB8AC3E}">
         <p14:creationId xmlns:p14="http://schemas.microsoft.com/office/powerpoint/2010/main" val="1977771175"/>
-      </p:ext>
-    </p:extLst>
-  </p:cSld>
-  <p:clrMapOvr>
-    <a:masterClrMapping/>
-  </p:clrMapOvr>
-</p:notes>
-</file>
-
-<file path=ppt/notesSlides/notesSlide8.xml><?xml version="1.0" encoding="utf-8"?>
-<p:notes xmlns:a="http://schemas.openxmlformats.org/drawingml/2006/main" xmlns:r="http://schemas.openxmlformats.org/officeDocument/2006/relationships" xmlns:p="http://schemas.openxmlformats.org/presentationml/2006/main">
-  <p:cSld>
-    <p:spTree>
-      <p:nvGrpSpPr>
-        <p:cNvPr id="1" name="">
-          <a:extLst>
-            <a:ext uri="{FF2B5EF4-FFF2-40B4-BE49-F238E27FC236}">
-              <a16:creationId xmlns:a16="http://schemas.microsoft.com/office/drawing/2014/main" id="{40805F28-CBC9-BBD3-38BA-7EC0F74E2F8B}"/>
-            </a:ext>
-          </a:extLst>
-        </p:cNvPr>
-        <p:cNvGrpSpPr/>
-        <p:nvPr/>
-      </p:nvGrpSpPr>
-      <p:grpSpPr>
-        <a:xfrm>
-          <a:off x="0" y="0"/>
-          <a:ext cx="0" cy="0"/>
-          <a:chOff x="0" y="0"/>
-          <a:chExt cx="0" cy="0"/>
-        </a:xfrm>
-      </p:grpSpPr>
-      <p:sp>
-        <p:nvSpPr>
-          <p:cNvPr id="2" name="Slide Image Placeholder 1">
-            <a:extLst>
-              <a:ext uri="{FF2B5EF4-FFF2-40B4-BE49-F238E27FC236}">
-                <a16:creationId xmlns:a16="http://schemas.microsoft.com/office/drawing/2014/main" id="{86CB047B-DA27-E867-0380-BDF47D6575A4}"/>
-              </a:ext>
-            </a:extLst>
-          </p:cNvPr>
-          <p:cNvSpPr>
-            <a:spLocks noGrp="1" noRot="1" noChangeAspect="1"/>
-          </p:cNvSpPr>
-          <p:nvPr>
-            <p:ph type="sldImg"/>
-          </p:nvPr>
-        </p:nvSpPr>
-        <p:spPr/>
-      </p:sp>
-      <p:sp>
-        <p:nvSpPr>
-          <p:cNvPr id="3" name="Notes Placeholder 2">
-            <a:extLst>
-              <a:ext uri="{FF2B5EF4-FFF2-40B4-BE49-F238E27FC236}">
-                <a16:creationId xmlns:a16="http://schemas.microsoft.com/office/drawing/2014/main" id="{58AB33BB-3511-DB12-E8D6-4FFE43AC72ED}"/>
-              </a:ext>
-            </a:extLst>
-          </p:cNvPr>
-          <p:cNvSpPr>
-            <a:spLocks noGrp="1"/>
-          </p:cNvSpPr>
-          <p:nvPr>
-            <p:ph type="body" idx="1"/>
-          </p:nvPr>
-        </p:nvSpPr>
-        <p:spPr/>
-        <p:txBody>
-          <a:bodyPr/>
-          <a:lstStyle/>
-          <a:p>
-            <a:endParaRPr lang="en-US" dirty="0"/>
-          </a:p>
-        </p:txBody>
-      </p:sp>
-      <p:sp>
-        <p:nvSpPr>
-          <p:cNvPr id="4" name="Slide Number Placeholder 3">
-            <a:extLst>
-              <a:ext uri="{FF2B5EF4-FFF2-40B4-BE49-F238E27FC236}">
-                <a16:creationId xmlns:a16="http://schemas.microsoft.com/office/drawing/2014/main" id="{69C902DD-E792-5A54-9BE7-A5CB58E67D61}"/>
-              </a:ext>
-            </a:extLst>
-          </p:cNvPr>
-          <p:cNvSpPr>
-            <a:spLocks noGrp="1"/>
-          </p:cNvSpPr>
-          <p:nvPr>
-            <p:ph type="sldNum" sz="quarter" idx="5"/>
-          </p:nvPr>
-        </p:nvSpPr>
-        <p:spPr/>
-        <p:txBody>
-          <a:bodyPr/>
-          <a:lstStyle/>
-          <a:p>
-            <a:fld id="{CCE09C32-A7D4-43E3-99E7-EFFD3BF61665}" type="slidenum">
-              <a:rPr lang="en-US" smtClean="0"/>
-              <a:t>10</a:t>
-            </a:fld>
-            <a:endParaRPr lang="en-US"/>
-          </a:p>
-        </p:txBody>
-      </p:sp>
-    </p:spTree>
-    <p:extLst>
-      <p:ext uri="{BB962C8B-B14F-4D97-AF65-F5344CB8AC3E}">
-        <p14:creationId xmlns:p14="http://schemas.microsoft.com/office/powerpoint/2010/main" val="3559407515"/>
-      </p:ext>
-    </p:extLst>
-  </p:cSld>
-  <p:clrMapOvr>
-    <a:masterClrMapping/>
-  </p:clrMapOvr>
-</p:notes>
-</file>
-
-<file path=ppt/notesSlides/notesSlide9.xml><?xml version="1.0" encoding="utf-8"?>
-<p:notes xmlns:a="http://schemas.openxmlformats.org/drawingml/2006/main" xmlns:r="http://schemas.openxmlformats.org/officeDocument/2006/relationships" xmlns:p="http://schemas.openxmlformats.org/presentationml/2006/main">
-  <p:cSld>
-    <p:spTree>
-      <p:nvGrpSpPr>
-        <p:cNvPr id="1" name="">
-          <a:extLst>
-            <a:ext uri="{FF2B5EF4-FFF2-40B4-BE49-F238E27FC236}">
-              <a16:creationId xmlns:a16="http://schemas.microsoft.com/office/drawing/2014/main" id="{6BE54475-0BC7-DB15-388A-0D2D5457C4CA}"/>
-            </a:ext>
-          </a:extLst>
-        </p:cNvPr>
-        <p:cNvGrpSpPr/>
-        <p:nvPr/>
-      </p:nvGrpSpPr>
-      <p:grpSpPr>
-        <a:xfrm>
-          <a:off x="0" y="0"/>
-          <a:ext cx="0" cy="0"/>
-          <a:chOff x="0" y="0"/>
-          <a:chExt cx="0" cy="0"/>
-        </a:xfrm>
-      </p:grpSpPr>
-      <p:sp>
-        <p:nvSpPr>
-          <p:cNvPr id="2" name="Slide Image Placeholder 1">
-            <a:extLst>
-              <a:ext uri="{FF2B5EF4-FFF2-40B4-BE49-F238E27FC236}">
-                <a16:creationId xmlns:a16="http://schemas.microsoft.com/office/drawing/2014/main" id="{669CEC4D-A2AF-6870-BE8A-7B211A28A503}"/>
-              </a:ext>
-            </a:extLst>
-          </p:cNvPr>
-          <p:cNvSpPr>
-            <a:spLocks noGrp="1" noRot="1" noChangeAspect="1"/>
-          </p:cNvSpPr>
-          <p:nvPr>
-            <p:ph type="sldImg"/>
-          </p:nvPr>
-        </p:nvSpPr>
-        <p:spPr/>
-      </p:sp>
-      <p:sp>
-        <p:nvSpPr>
-          <p:cNvPr id="3" name="Notes Placeholder 2">
-            <a:extLst>
-              <a:ext uri="{FF2B5EF4-FFF2-40B4-BE49-F238E27FC236}">
-                <a16:creationId xmlns:a16="http://schemas.microsoft.com/office/drawing/2014/main" id="{8A560737-AE9B-C570-F531-9888286DCA4D}"/>
-              </a:ext>
-            </a:extLst>
-          </p:cNvPr>
-          <p:cNvSpPr>
-            <a:spLocks noGrp="1"/>
-          </p:cNvSpPr>
-          <p:nvPr>
-            <p:ph type="body" idx="1"/>
-          </p:nvPr>
-        </p:nvSpPr>
-        <p:spPr/>
-        <p:txBody>
-          <a:bodyPr/>
-          <a:lstStyle/>
-          <a:p>
-            <a:r>
-              <a:rPr lang="en-US" dirty="0"/>
-              <a:t>- If all I need is for my server to continuously tell the browser something happened, I don't necessarily need </a:t>
-            </a:r>
-            <a:r>
-              <a:rPr lang="en-US" dirty="0" err="1"/>
-              <a:t>SignalR</a:t>
-            </a:r>
-            <a:r>
-              <a:rPr lang="en-US" dirty="0"/>
-              <a:t>.</a:t>
-            </a:r>
-            <a:br>
-              <a:rPr lang="en-US" dirty="0"/>
-            </a:br>
-            <a:r>
-              <a:rPr lang="en-US" dirty="0"/>
-              <a:t>- </a:t>
-            </a:r>
-          </a:p>
-        </p:txBody>
-      </p:sp>
-      <p:sp>
-        <p:nvSpPr>
-          <p:cNvPr id="4" name="Slide Number Placeholder 3">
-            <a:extLst>
-              <a:ext uri="{FF2B5EF4-FFF2-40B4-BE49-F238E27FC236}">
-                <a16:creationId xmlns:a16="http://schemas.microsoft.com/office/drawing/2014/main" id="{F37C3F09-F97C-C4F9-3C28-5FD6FA2334A9}"/>
-              </a:ext>
-            </a:extLst>
-          </p:cNvPr>
-          <p:cNvSpPr>
-            <a:spLocks noGrp="1"/>
-          </p:cNvSpPr>
-          <p:nvPr>
-            <p:ph type="sldNum" sz="quarter" idx="5"/>
-          </p:nvPr>
-        </p:nvSpPr>
-        <p:spPr/>
-        <p:txBody>
-          <a:bodyPr/>
-          <a:lstStyle/>
-          <a:p>
-            <a:fld id="{CCE09C32-A7D4-43E3-99E7-EFFD3BF61665}" type="slidenum">
-              <a:rPr lang="en-US" smtClean="0"/>
-              <a:t>11</a:t>
-            </a:fld>
-            <a:endParaRPr lang="en-US"/>
-          </a:p>
-        </p:txBody>
-      </p:sp>
-    </p:spTree>
-    <p:extLst>
-      <p:ext uri="{BB962C8B-B14F-4D97-AF65-F5344CB8AC3E}">
-        <p14:creationId xmlns:p14="http://schemas.microsoft.com/office/powerpoint/2010/main" val="3970970653"/>
       </p:ext>
     </p:extLst>
   </p:cSld>
@@ -3815,6 +4033,713 @@
         <p:cNvPr id="1" name="">
           <a:extLst>
             <a:ext uri="{FF2B5EF4-FFF2-40B4-BE49-F238E27FC236}">
+              <a16:creationId xmlns:a16="http://schemas.microsoft.com/office/drawing/2014/main" id="{9DDD6404-AA7F-105C-B3BC-325FA289005C}"/>
+            </a:ext>
+          </a:extLst>
+        </p:cNvPr>
+        <p:cNvGrpSpPr/>
+        <p:nvPr/>
+      </p:nvGrpSpPr>
+      <p:grpSpPr>
+        <a:xfrm>
+          <a:off x="0" y="0"/>
+          <a:ext cx="0" cy="0"/>
+          <a:chOff x="0" y="0"/>
+          <a:chExt cx="0" cy="0"/>
+        </a:xfrm>
+      </p:grpSpPr>
+      <p:sp>
+        <p:nvSpPr>
+          <p:cNvPr id="2" name="Title 1">
+            <a:extLst>
+              <a:ext uri="{FF2B5EF4-FFF2-40B4-BE49-F238E27FC236}">
+                <a16:creationId xmlns:a16="http://schemas.microsoft.com/office/drawing/2014/main" id="{33683F0B-4EC2-563B-344E-73F689AAC8E0}"/>
+              </a:ext>
+            </a:extLst>
+          </p:cNvPr>
+          <p:cNvSpPr>
+            <a:spLocks noGrp="1"/>
+          </p:cNvSpPr>
+          <p:nvPr>
+            <p:ph type="title"/>
+          </p:nvPr>
+        </p:nvSpPr>
+        <p:spPr>
+          <a:xfrm>
+            <a:off x="4158342" y="1027653"/>
+            <a:ext cx="12510408" cy="1143000"/>
+          </a:xfrm>
+        </p:spPr>
+        <p:txBody>
+          <a:bodyPr lIns="91440" tIns="45720" rIns="91440" bIns="45720" anchor="t"/>
+          <a:lstStyle/>
+          <a:p>
+            <a:r>
+              <a:rPr lang="en-US" dirty="0"/>
+              <a:t>Comparison (SSE user management)</a:t>
+            </a:r>
+          </a:p>
+        </p:txBody>
+      </p:sp>
+      <p:pic>
+        <p:nvPicPr>
+          <p:cNvPr id="4" name="Picture 3">
+            <a:extLst>
+              <a:ext uri="{FF2B5EF4-FFF2-40B4-BE49-F238E27FC236}">
+                <a16:creationId xmlns:a16="http://schemas.microsoft.com/office/drawing/2014/main" id="{7055E0CF-3E91-3220-04C5-B8A337FB1262}"/>
+              </a:ext>
+            </a:extLst>
+          </p:cNvPr>
+          <p:cNvPicPr>
+            <a:picLocks noChangeAspect="1"/>
+          </p:cNvPicPr>
+          <p:nvPr/>
+        </p:nvPicPr>
+        <p:blipFill>
+          <a:blip r:embed="rId3"/>
+          <a:stretch>
+            <a:fillRect/>
+          </a:stretch>
+        </p:blipFill>
+        <p:spPr>
+          <a:xfrm>
+            <a:off x="1023937" y="2170653"/>
+            <a:ext cx="16797471" cy="6754272"/>
+          </a:xfrm>
+          <a:prstGeom prst="rect">
+            <a:avLst/>
+          </a:prstGeom>
+        </p:spPr>
+      </p:pic>
+    </p:spTree>
+    <p:extLst>
+      <p:ext uri="{BB962C8B-B14F-4D97-AF65-F5344CB8AC3E}">
+        <p14:creationId xmlns:p14="http://schemas.microsoft.com/office/powerpoint/2010/main" val="4101396801"/>
+      </p:ext>
+    </p:extLst>
+  </p:cSld>
+  <p:clrMapOvr>
+    <a:masterClrMapping/>
+  </p:clrMapOvr>
+</p:sld>
+</file>
+
+<file path=ppt/slides/slide11.xml><?xml version="1.0" encoding="utf-8"?>
+<p:sld xmlns:a="http://schemas.openxmlformats.org/drawingml/2006/main" xmlns:r="http://schemas.openxmlformats.org/officeDocument/2006/relationships" xmlns:p="http://schemas.openxmlformats.org/presentationml/2006/main">
+  <p:cSld>
+    <p:spTree>
+      <p:nvGrpSpPr>
+        <p:cNvPr id="1" name="">
+          <a:extLst>
+            <a:ext uri="{FF2B5EF4-FFF2-40B4-BE49-F238E27FC236}">
+              <a16:creationId xmlns:a16="http://schemas.microsoft.com/office/drawing/2014/main" id="{203A19BF-D60F-217E-2EC5-9769EAA8AF9B}"/>
+            </a:ext>
+          </a:extLst>
+        </p:cNvPr>
+        <p:cNvGrpSpPr/>
+        <p:nvPr/>
+      </p:nvGrpSpPr>
+      <p:grpSpPr>
+        <a:xfrm>
+          <a:off x="0" y="0"/>
+          <a:ext cx="0" cy="0"/>
+          <a:chOff x="0" y="0"/>
+          <a:chExt cx="0" cy="0"/>
+        </a:xfrm>
+      </p:grpSpPr>
+      <p:sp>
+        <p:nvSpPr>
+          <p:cNvPr id="2" name="Title 1">
+            <a:extLst>
+              <a:ext uri="{FF2B5EF4-FFF2-40B4-BE49-F238E27FC236}">
+                <a16:creationId xmlns:a16="http://schemas.microsoft.com/office/drawing/2014/main" id="{BA3C2CE1-5C4F-2E65-56BB-04F004612B17}"/>
+              </a:ext>
+            </a:extLst>
+          </p:cNvPr>
+          <p:cNvSpPr>
+            <a:spLocks noGrp="1"/>
+          </p:cNvSpPr>
+          <p:nvPr>
+            <p:ph type="title"/>
+          </p:nvPr>
+        </p:nvSpPr>
+        <p:spPr/>
+        <p:txBody>
+          <a:bodyPr lIns="91440" tIns="45720" rIns="91440" bIns="45720" anchor="t"/>
+          <a:lstStyle/>
+          <a:p>
+            <a:r>
+              <a:rPr lang="en-US" dirty="0"/>
+              <a:t>How to choose?</a:t>
+            </a:r>
+          </a:p>
+        </p:txBody>
+      </p:sp>
+      <p:sp>
+        <p:nvSpPr>
+          <p:cNvPr id="5" name="TextBox 4">
+            <a:extLst>
+              <a:ext uri="{FF2B5EF4-FFF2-40B4-BE49-F238E27FC236}">
+                <a16:creationId xmlns:a16="http://schemas.microsoft.com/office/drawing/2014/main" id="{7EB95148-4134-AFB7-2AE3-9A42ACF71429}"/>
+              </a:ext>
+            </a:extLst>
+          </p:cNvPr>
+          <p:cNvSpPr txBox="1"/>
+          <p:nvPr/>
+        </p:nvSpPr>
+        <p:spPr>
+          <a:xfrm>
+            <a:off x="1819275" y="2320877"/>
+            <a:ext cx="13735050" cy="584775"/>
+          </a:xfrm>
+          <a:prstGeom prst="rect">
+            <a:avLst/>
+          </a:prstGeom>
+          <a:noFill/>
+        </p:spPr>
+        <p:txBody>
+          <a:bodyPr wrap="square" rtlCol="0">
+            <a:spAutoFit/>
+          </a:bodyPr>
+          <a:lstStyle/>
+          <a:p>
+            <a:pPr marL="285750" indent="-285750" algn="l">
+              <a:buFont typeface="Arial" panose="020B0604020202020204" pitchFamily="34" charset="0"/>
+              <a:buChar char="•"/>
+            </a:pPr>
+            <a:r>
+              <a:rPr lang="en-US" sz="3200" dirty="0"/>
+              <a:t>One way / two-way communication?</a:t>
+            </a:r>
+          </a:p>
+        </p:txBody>
+      </p:sp>
+      <p:sp>
+        <p:nvSpPr>
+          <p:cNvPr id="9" name="TextBox 8">
+            <a:extLst>
+              <a:ext uri="{FF2B5EF4-FFF2-40B4-BE49-F238E27FC236}">
+                <a16:creationId xmlns:a16="http://schemas.microsoft.com/office/drawing/2014/main" id="{661CD8C0-17AE-4ACC-A531-0B8C20F79086}"/>
+              </a:ext>
+            </a:extLst>
+          </p:cNvPr>
+          <p:cNvSpPr txBox="1"/>
+          <p:nvPr/>
+        </p:nvSpPr>
+        <p:spPr>
+          <a:xfrm>
+            <a:off x="1819275" y="3272926"/>
+            <a:ext cx="13735050" cy="584775"/>
+          </a:xfrm>
+          <a:prstGeom prst="rect">
+            <a:avLst/>
+          </a:prstGeom>
+          <a:noFill/>
+        </p:spPr>
+        <p:txBody>
+          <a:bodyPr wrap="square" rtlCol="0">
+            <a:spAutoFit/>
+          </a:bodyPr>
+          <a:lstStyle/>
+          <a:p>
+            <a:pPr marL="285750" indent="-285750" algn="l">
+              <a:buFont typeface="Arial" panose="020B0604020202020204" pitchFamily="34" charset="0"/>
+              <a:buChar char="•"/>
+            </a:pPr>
+            <a:r>
+              <a:rPr lang="en-US" sz="3200" dirty="0"/>
+              <a:t>Trade-offs (users/groups/broadcasting)</a:t>
+            </a:r>
+          </a:p>
+        </p:txBody>
+      </p:sp>
+      <p:pic>
+        <p:nvPicPr>
+          <p:cNvPr id="15" name="Picture 14">
+            <a:extLst>
+              <a:ext uri="{FF2B5EF4-FFF2-40B4-BE49-F238E27FC236}">
+                <a16:creationId xmlns:a16="http://schemas.microsoft.com/office/drawing/2014/main" id="{C2ADF83C-2DB1-CBB5-A142-2E7E21EBAC04}"/>
+              </a:ext>
+            </a:extLst>
+          </p:cNvPr>
+          <p:cNvPicPr>
+            <a:picLocks noChangeAspect="1"/>
+          </p:cNvPicPr>
+          <p:nvPr/>
+        </p:nvPicPr>
+        <p:blipFill>
+          <a:blip r:embed="rId3"/>
+          <a:stretch>
+            <a:fillRect/>
+          </a:stretch>
+        </p:blipFill>
+        <p:spPr>
+          <a:xfrm>
+            <a:off x="7786687" y="3272926"/>
+            <a:ext cx="9005821" cy="5875836"/>
+          </a:xfrm>
+          <a:prstGeom prst="rect">
+            <a:avLst/>
+          </a:prstGeom>
+        </p:spPr>
+      </p:pic>
+    </p:spTree>
+    <p:extLst>
+      <p:ext uri="{BB962C8B-B14F-4D97-AF65-F5344CB8AC3E}">
+        <p14:creationId xmlns:p14="http://schemas.microsoft.com/office/powerpoint/2010/main" val="3566949938"/>
+      </p:ext>
+    </p:extLst>
+  </p:cSld>
+  <p:clrMapOvr>
+    <a:masterClrMapping/>
+  </p:clrMapOvr>
+  <p:timing>
+    <p:tnLst>
+      <p:par>
+        <p:cTn id="1" dur="indefinite" restart="never" nodeType="tmRoot">
+          <p:childTnLst>
+            <p:seq concurrent="1" nextAc="seek">
+              <p:cTn id="2" dur="indefinite" nodeType="mainSeq">
+                <p:childTnLst>
+                  <p:par>
+                    <p:cTn id="3" fill="hold">
+                      <p:stCondLst>
+                        <p:cond delay="indefinite"/>
+                      </p:stCondLst>
+                      <p:childTnLst>
+                        <p:par>
+                          <p:cTn id="4" fill="hold">
+                            <p:stCondLst>
+                              <p:cond delay="0"/>
+                            </p:stCondLst>
+                            <p:childTnLst>
+                              <p:par>
+                                <p:cTn id="5" presetID="10" presetClass="entr" presetSubtype="0" fill="hold" grpId="0" nodeType="clickEffect">
+                                  <p:stCondLst>
+                                    <p:cond delay="0"/>
+                                  </p:stCondLst>
+                                  <p:childTnLst>
+                                    <p:set>
+                                      <p:cBhvr>
+                                        <p:cTn id="6" dur="1" fill="hold">
+                                          <p:stCondLst>
+                                            <p:cond delay="0"/>
+                                          </p:stCondLst>
+                                        </p:cTn>
+                                        <p:tgtEl>
+                                          <p:spTgt spid="5"/>
+                                        </p:tgtEl>
+                                        <p:attrNameLst>
+                                          <p:attrName>style.visibility</p:attrName>
+                                        </p:attrNameLst>
+                                      </p:cBhvr>
+                                      <p:to>
+                                        <p:strVal val="visible"/>
+                                      </p:to>
+                                    </p:set>
+                                    <p:animEffect transition="in" filter="fade">
+                                      <p:cBhvr>
+                                        <p:cTn id="7" dur="500"/>
+                                        <p:tgtEl>
+                                          <p:spTgt spid="5"/>
+                                        </p:tgtEl>
+                                      </p:cBhvr>
+                                    </p:animEffect>
+                                  </p:childTnLst>
+                                </p:cTn>
+                              </p:par>
+                            </p:childTnLst>
+                          </p:cTn>
+                        </p:par>
+                      </p:childTnLst>
+                    </p:cTn>
+                  </p:par>
+                  <p:par>
+                    <p:cTn id="8" fill="hold">
+                      <p:stCondLst>
+                        <p:cond delay="indefinite"/>
+                      </p:stCondLst>
+                      <p:childTnLst>
+                        <p:par>
+                          <p:cTn id="9" fill="hold">
+                            <p:stCondLst>
+                              <p:cond delay="0"/>
+                            </p:stCondLst>
+                            <p:childTnLst>
+                              <p:par>
+                                <p:cTn id="10" presetID="10" presetClass="entr" presetSubtype="0" fill="hold" grpId="0" nodeType="clickEffect">
+                                  <p:stCondLst>
+                                    <p:cond delay="0"/>
+                                  </p:stCondLst>
+                                  <p:childTnLst>
+                                    <p:set>
+                                      <p:cBhvr>
+                                        <p:cTn id="11" dur="1" fill="hold">
+                                          <p:stCondLst>
+                                            <p:cond delay="0"/>
+                                          </p:stCondLst>
+                                        </p:cTn>
+                                        <p:tgtEl>
+                                          <p:spTgt spid="9"/>
+                                        </p:tgtEl>
+                                        <p:attrNameLst>
+                                          <p:attrName>style.visibility</p:attrName>
+                                        </p:attrNameLst>
+                                      </p:cBhvr>
+                                      <p:to>
+                                        <p:strVal val="visible"/>
+                                      </p:to>
+                                    </p:set>
+                                    <p:animEffect transition="in" filter="fade">
+                                      <p:cBhvr>
+                                        <p:cTn id="12" dur="500"/>
+                                        <p:tgtEl>
+                                          <p:spTgt spid="9"/>
+                                        </p:tgtEl>
+                                      </p:cBhvr>
+                                    </p:animEffect>
+                                  </p:childTnLst>
+                                </p:cTn>
+                              </p:par>
+                            </p:childTnLst>
+                          </p:cTn>
+                        </p:par>
+                      </p:childTnLst>
+                    </p:cTn>
+                  </p:par>
+                  <p:par>
+                    <p:cTn id="13" fill="hold">
+                      <p:stCondLst>
+                        <p:cond delay="indefinite"/>
+                      </p:stCondLst>
+                      <p:childTnLst>
+                        <p:par>
+                          <p:cTn id="14" fill="hold">
+                            <p:stCondLst>
+                              <p:cond delay="0"/>
+                            </p:stCondLst>
+                            <p:childTnLst>
+                              <p:par>
+                                <p:cTn id="15" presetID="26" presetClass="entr" presetSubtype="0" fill="hold" nodeType="clickEffect">
+                                  <p:stCondLst>
+                                    <p:cond delay="0"/>
+                                  </p:stCondLst>
+                                  <p:childTnLst>
+                                    <p:set>
+                                      <p:cBhvr>
+                                        <p:cTn id="16" dur="1" fill="hold">
+                                          <p:stCondLst>
+                                            <p:cond delay="0"/>
+                                          </p:stCondLst>
+                                        </p:cTn>
+                                        <p:tgtEl>
+                                          <p:spTgt spid="15"/>
+                                        </p:tgtEl>
+                                        <p:attrNameLst>
+                                          <p:attrName>style.visibility</p:attrName>
+                                        </p:attrNameLst>
+                                      </p:cBhvr>
+                                      <p:to>
+                                        <p:strVal val="visible"/>
+                                      </p:to>
+                                    </p:set>
+                                    <p:animEffect transition="in" filter="wipe(down)">
+                                      <p:cBhvr>
+                                        <p:cTn id="17" dur="580">
+                                          <p:stCondLst>
+                                            <p:cond delay="0"/>
+                                          </p:stCondLst>
+                                        </p:cTn>
+                                        <p:tgtEl>
+                                          <p:spTgt spid="15"/>
+                                        </p:tgtEl>
+                                      </p:cBhvr>
+                                    </p:animEffect>
+                                    <p:anim calcmode="lin" valueType="num">
+                                      <p:cBhvr>
+                                        <p:cTn id="18" dur="1822" tmFilter="0,0; 0.14,0.36; 0.43,0.73; 0.71,0.91; 1.0,1.0">
+                                          <p:stCondLst>
+                                            <p:cond delay="0"/>
+                                          </p:stCondLst>
+                                        </p:cTn>
+                                        <p:tgtEl>
+                                          <p:spTgt spid="15"/>
+                                        </p:tgtEl>
+                                        <p:attrNameLst>
+                                          <p:attrName>ppt_x</p:attrName>
+                                        </p:attrNameLst>
+                                      </p:cBhvr>
+                                      <p:tavLst>
+                                        <p:tav tm="0">
+                                          <p:val>
+                                            <p:strVal val="#ppt_x-0.25"/>
+                                          </p:val>
+                                        </p:tav>
+                                        <p:tav tm="100000">
+                                          <p:val>
+                                            <p:strVal val="#ppt_x"/>
+                                          </p:val>
+                                        </p:tav>
+                                      </p:tavLst>
+                                    </p:anim>
+                                    <p:anim calcmode="lin" valueType="num">
+                                      <p:cBhvr>
+                                        <p:cTn id="19" dur="664" tmFilter="0.0,0.0; 0.25,0.07; 0.50,0.2; 0.75,0.467; 1.0,1.0">
+                                          <p:stCondLst>
+                                            <p:cond delay="0"/>
+                                          </p:stCondLst>
+                                        </p:cTn>
+                                        <p:tgtEl>
+                                          <p:spTgt spid="15"/>
+                                        </p:tgtEl>
+                                        <p:attrNameLst>
+                                          <p:attrName>ppt_y</p:attrName>
+                                        </p:attrNameLst>
+                                      </p:cBhvr>
+                                      <p:tavLst>
+                                        <p:tav tm="0" fmla="#ppt_y-sin(pi*$)/3">
+                                          <p:val>
+                                            <p:fltVal val="0.5"/>
+                                          </p:val>
+                                        </p:tav>
+                                        <p:tav tm="100000">
+                                          <p:val>
+                                            <p:fltVal val="1"/>
+                                          </p:val>
+                                        </p:tav>
+                                      </p:tavLst>
+                                    </p:anim>
+                                    <p:anim calcmode="lin" valueType="num">
+                                      <p:cBhvr>
+                                        <p:cTn id="20" dur="664" tmFilter="0, 0; 0.125,0.2665; 0.25,0.4; 0.375,0.465; 0.5,0.5;  0.625,0.535; 0.75,0.6; 0.875,0.7335; 1,1">
+                                          <p:stCondLst>
+                                            <p:cond delay="664"/>
+                                          </p:stCondLst>
+                                        </p:cTn>
+                                        <p:tgtEl>
+                                          <p:spTgt spid="15"/>
+                                        </p:tgtEl>
+                                        <p:attrNameLst>
+                                          <p:attrName>ppt_y</p:attrName>
+                                        </p:attrNameLst>
+                                      </p:cBhvr>
+                                      <p:tavLst>
+                                        <p:tav tm="0" fmla="#ppt_y-sin(pi*$)/9">
+                                          <p:val>
+                                            <p:fltVal val="0"/>
+                                          </p:val>
+                                        </p:tav>
+                                        <p:tav tm="100000">
+                                          <p:val>
+                                            <p:fltVal val="1"/>
+                                          </p:val>
+                                        </p:tav>
+                                      </p:tavLst>
+                                    </p:anim>
+                                    <p:anim calcmode="lin" valueType="num">
+                                      <p:cBhvr>
+                                        <p:cTn id="21" dur="332" tmFilter="0, 0; 0.125,0.2665; 0.25,0.4; 0.375,0.465; 0.5,0.5;  0.625,0.535; 0.75,0.6; 0.875,0.7335; 1,1">
+                                          <p:stCondLst>
+                                            <p:cond delay="1324"/>
+                                          </p:stCondLst>
+                                        </p:cTn>
+                                        <p:tgtEl>
+                                          <p:spTgt spid="15"/>
+                                        </p:tgtEl>
+                                        <p:attrNameLst>
+                                          <p:attrName>ppt_y</p:attrName>
+                                        </p:attrNameLst>
+                                      </p:cBhvr>
+                                      <p:tavLst>
+                                        <p:tav tm="0" fmla="#ppt_y-sin(pi*$)/27">
+                                          <p:val>
+                                            <p:fltVal val="0"/>
+                                          </p:val>
+                                        </p:tav>
+                                        <p:tav tm="100000">
+                                          <p:val>
+                                            <p:fltVal val="1"/>
+                                          </p:val>
+                                        </p:tav>
+                                      </p:tavLst>
+                                    </p:anim>
+                                    <p:anim calcmode="lin" valueType="num">
+                                      <p:cBhvr>
+                                        <p:cTn id="22" dur="164" tmFilter="0, 0; 0.125,0.2665; 0.25,0.4; 0.375,0.465; 0.5,0.5;  0.625,0.535; 0.75,0.6; 0.875,0.7335; 1,1">
+                                          <p:stCondLst>
+                                            <p:cond delay="1656"/>
+                                          </p:stCondLst>
+                                        </p:cTn>
+                                        <p:tgtEl>
+                                          <p:spTgt spid="15"/>
+                                        </p:tgtEl>
+                                        <p:attrNameLst>
+                                          <p:attrName>ppt_y</p:attrName>
+                                        </p:attrNameLst>
+                                      </p:cBhvr>
+                                      <p:tavLst>
+                                        <p:tav tm="0" fmla="#ppt_y-sin(pi*$)/81">
+                                          <p:val>
+                                            <p:fltVal val="0"/>
+                                          </p:val>
+                                        </p:tav>
+                                        <p:tav tm="100000">
+                                          <p:val>
+                                            <p:fltVal val="1"/>
+                                          </p:val>
+                                        </p:tav>
+                                      </p:tavLst>
+                                    </p:anim>
+                                    <p:animScale>
+                                      <p:cBhvr>
+                                        <p:cTn id="23" dur="26">
+                                          <p:stCondLst>
+                                            <p:cond delay="650"/>
+                                          </p:stCondLst>
+                                        </p:cTn>
+                                        <p:tgtEl>
+                                          <p:spTgt spid="15"/>
+                                        </p:tgtEl>
+                                      </p:cBhvr>
+                                      <p:to x="100000" y="60000"/>
+                                    </p:animScale>
+                                    <p:animScale>
+                                      <p:cBhvr>
+                                        <p:cTn id="24" dur="166" decel="50000">
+                                          <p:stCondLst>
+                                            <p:cond delay="676"/>
+                                          </p:stCondLst>
+                                        </p:cTn>
+                                        <p:tgtEl>
+                                          <p:spTgt spid="15"/>
+                                        </p:tgtEl>
+                                      </p:cBhvr>
+                                      <p:to x="100000" y="100000"/>
+                                    </p:animScale>
+                                    <p:animScale>
+                                      <p:cBhvr>
+                                        <p:cTn id="25" dur="26">
+                                          <p:stCondLst>
+                                            <p:cond delay="1312"/>
+                                          </p:stCondLst>
+                                        </p:cTn>
+                                        <p:tgtEl>
+                                          <p:spTgt spid="15"/>
+                                        </p:tgtEl>
+                                      </p:cBhvr>
+                                      <p:to x="100000" y="80000"/>
+                                    </p:animScale>
+                                    <p:animScale>
+                                      <p:cBhvr>
+                                        <p:cTn id="26" dur="166" decel="50000">
+                                          <p:stCondLst>
+                                            <p:cond delay="1338"/>
+                                          </p:stCondLst>
+                                        </p:cTn>
+                                        <p:tgtEl>
+                                          <p:spTgt spid="15"/>
+                                        </p:tgtEl>
+                                      </p:cBhvr>
+                                      <p:to x="100000" y="100000"/>
+                                    </p:animScale>
+                                    <p:animScale>
+                                      <p:cBhvr>
+                                        <p:cTn id="27" dur="26">
+                                          <p:stCondLst>
+                                            <p:cond delay="1642"/>
+                                          </p:stCondLst>
+                                        </p:cTn>
+                                        <p:tgtEl>
+                                          <p:spTgt spid="15"/>
+                                        </p:tgtEl>
+                                      </p:cBhvr>
+                                      <p:to x="100000" y="90000"/>
+                                    </p:animScale>
+                                    <p:animScale>
+                                      <p:cBhvr>
+                                        <p:cTn id="28" dur="166" decel="50000">
+                                          <p:stCondLst>
+                                            <p:cond delay="1668"/>
+                                          </p:stCondLst>
+                                        </p:cTn>
+                                        <p:tgtEl>
+                                          <p:spTgt spid="15"/>
+                                        </p:tgtEl>
+                                      </p:cBhvr>
+                                      <p:to x="100000" y="100000"/>
+                                    </p:animScale>
+                                    <p:animScale>
+                                      <p:cBhvr>
+                                        <p:cTn id="29" dur="26">
+                                          <p:stCondLst>
+                                            <p:cond delay="1808"/>
+                                          </p:stCondLst>
+                                        </p:cTn>
+                                        <p:tgtEl>
+                                          <p:spTgt spid="15"/>
+                                        </p:tgtEl>
+                                      </p:cBhvr>
+                                      <p:to x="100000" y="95000"/>
+                                    </p:animScale>
+                                    <p:animScale>
+                                      <p:cBhvr>
+                                        <p:cTn id="30" dur="166" decel="50000">
+                                          <p:stCondLst>
+                                            <p:cond delay="1834"/>
+                                          </p:stCondLst>
+                                        </p:cTn>
+                                        <p:tgtEl>
+                                          <p:spTgt spid="15"/>
+                                        </p:tgtEl>
+                                      </p:cBhvr>
+                                      <p:to x="100000" y="100000"/>
+                                    </p:animScale>
+                                  </p:childTnLst>
+                                </p:cTn>
+                              </p:par>
+                            </p:childTnLst>
+                          </p:cTn>
+                        </p:par>
+                      </p:childTnLst>
+                    </p:cTn>
+                  </p:par>
+                </p:childTnLst>
+              </p:cTn>
+              <p:prevCondLst>
+                <p:cond evt="onPrev" delay="0">
+                  <p:tgtEl>
+                    <p:sldTgt/>
+                  </p:tgtEl>
+                </p:cond>
+              </p:prevCondLst>
+              <p:nextCondLst>
+                <p:cond evt="onNext" delay="0">
+                  <p:tgtEl>
+                    <p:sldTgt/>
+                  </p:tgtEl>
+                </p:cond>
+              </p:nextCondLst>
+            </p:seq>
+          </p:childTnLst>
+        </p:cTn>
+      </p:par>
+    </p:tnLst>
+    <p:bldLst>
+      <p:bldP spid="5" grpId="0"/>
+      <p:bldP spid="9" grpId="0"/>
+    </p:bldLst>
+  </p:timing>
+</p:sld>
+</file>
+
+<file path=ppt/slides/slide12.xml><?xml version="1.0" encoding="utf-8"?>
+<p:sld xmlns:a="http://schemas.openxmlformats.org/drawingml/2006/main" xmlns:r="http://schemas.openxmlformats.org/officeDocument/2006/relationships" xmlns:p="http://schemas.openxmlformats.org/presentationml/2006/main">
+  <p:cSld>
+    <p:spTree>
+      <p:nvGrpSpPr>
+        <p:cNvPr id="1" name="">
+          <a:extLst>
+            <a:ext uri="{FF2B5EF4-FFF2-40B4-BE49-F238E27FC236}">
               <a16:creationId xmlns:a16="http://schemas.microsoft.com/office/drawing/2014/main" id="{B5452ADD-BAC6-CE9B-E63A-50CC6AF9A1A6}"/>
             </a:ext>
           </a:extLst>
@@ -4087,7 +5012,7 @@
 </p:sld>
 </file>
 
-<file path=ppt/slides/slide11.xml><?xml version="1.0" encoding="utf-8"?>
+<file path=ppt/slides/slide13.xml><?xml version="1.0" encoding="utf-8"?>
 <p:sld xmlns:a="http://schemas.openxmlformats.org/drawingml/2006/main" xmlns:r="http://schemas.openxmlformats.org/officeDocument/2006/relationships" xmlns:p="http://schemas.openxmlformats.org/presentationml/2006/main">
   <p:cSld>
     <p:spTree>
@@ -4555,7 +5480,7 @@
 </p:sld>
 </file>
 
-<file path=ppt/slides/slide12.xml><?xml version="1.0" encoding="utf-8"?>
+<file path=ppt/slides/slide14.xml><?xml version="1.0" encoding="utf-8"?>
 <p:sld xmlns:a="http://schemas.openxmlformats.org/drawingml/2006/main" xmlns:r="http://schemas.openxmlformats.org/officeDocument/2006/relationships" xmlns:p="http://schemas.openxmlformats.org/presentationml/2006/main">
   <p:cSld>
     <p:bg>
@@ -10602,7 +11527,7 @@
         <p:cNvPr id="1" name="">
           <a:extLst>
             <a:ext uri="{FF2B5EF4-FFF2-40B4-BE49-F238E27FC236}">
-              <a16:creationId xmlns:a16="http://schemas.microsoft.com/office/drawing/2014/main" id="{203A19BF-D60F-217E-2EC5-9769EAA8AF9B}"/>
+              <a16:creationId xmlns:a16="http://schemas.microsoft.com/office/drawing/2014/main" id="{2399B061-AD8C-09DC-4C09-169C38076BEA}"/>
             </a:ext>
           </a:extLst>
         </p:cNvPr>
@@ -10622,7 +11547,7 @@
           <p:cNvPr id="2" name="Title 1">
             <a:extLst>
               <a:ext uri="{FF2B5EF4-FFF2-40B4-BE49-F238E27FC236}">
-                <a16:creationId xmlns:a16="http://schemas.microsoft.com/office/drawing/2014/main" id="{BA3C2CE1-5C4F-2E65-56BB-04F004612B17}"/>
+                <a16:creationId xmlns:a16="http://schemas.microsoft.com/office/drawing/2014/main" id="{7953DD37-EA47-AE97-660D-3B3788701B42}"/>
               </a:ext>
             </a:extLst>
           </p:cNvPr>
@@ -10633,102 +11558,37 @@
             <p:ph type="title"/>
           </p:nvPr>
         </p:nvSpPr>
-        <p:spPr/>
+        <p:spPr>
+          <a:xfrm>
+            <a:off x="4158342" y="1027653"/>
+            <a:ext cx="12510408" cy="1143000"/>
+          </a:xfrm>
+        </p:spPr>
         <p:txBody>
           <a:bodyPr lIns="91440" tIns="45720" rIns="91440" bIns="45720" anchor="t"/>
           <a:lstStyle/>
           <a:p>
             <a:r>
               <a:rPr lang="en-US" dirty="0"/>
-              <a:t>How to choose?</a:t>
+              <a:t>Comparison (</a:t>
             </a:r>
-          </a:p>
-        </p:txBody>
-      </p:sp>
-      <p:sp>
-        <p:nvSpPr>
-          <p:cNvPr id="5" name="TextBox 4">
-            <a:extLst>
-              <a:ext uri="{FF2B5EF4-FFF2-40B4-BE49-F238E27FC236}">
-                <a16:creationId xmlns:a16="http://schemas.microsoft.com/office/drawing/2014/main" id="{7EB95148-4134-AFB7-2AE3-9A42ACF71429}"/>
-              </a:ext>
-            </a:extLst>
-          </p:cNvPr>
-          <p:cNvSpPr txBox="1"/>
-          <p:nvPr/>
-        </p:nvSpPr>
-        <p:spPr>
-          <a:xfrm>
-            <a:off x="1819275" y="2320877"/>
-            <a:ext cx="13735050" cy="584775"/>
-          </a:xfrm>
-          <a:prstGeom prst="rect">
-            <a:avLst/>
-          </a:prstGeom>
-          <a:noFill/>
-        </p:spPr>
-        <p:txBody>
-          <a:bodyPr wrap="square" rtlCol="0">
-            <a:spAutoFit/>
-          </a:bodyPr>
-          <a:lstStyle/>
-          <a:p>
-            <a:pPr marL="285750" indent="-285750" algn="l">
-              <a:buFont typeface="Arial" panose="020B0604020202020204" pitchFamily="34" charset="0"/>
-              <a:buChar char="•"/>
-            </a:pPr>
             <a:r>
-              <a:rPr lang="en-US" sz="3200" dirty="0"/>
-              <a:t>One way / two-way communication?</a:t>
+              <a:rPr lang="en-US" dirty="0" err="1"/>
+              <a:t>SignalR</a:t>
             </a:r>
-          </a:p>
-        </p:txBody>
-      </p:sp>
-      <p:sp>
-        <p:nvSpPr>
-          <p:cNvPr id="9" name="TextBox 8">
-            <a:extLst>
-              <a:ext uri="{FF2B5EF4-FFF2-40B4-BE49-F238E27FC236}">
-                <a16:creationId xmlns:a16="http://schemas.microsoft.com/office/drawing/2014/main" id="{661CD8C0-17AE-4ACC-A531-0B8C20F79086}"/>
-              </a:ext>
-            </a:extLst>
-          </p:cNvPr>
-          <p:cNvSpPr txBox="1"/>
-          <p:nvPr/>
-        </p:nvSpPr>
-        <p:spPr>
-          <a:xfrm>
-            <a:off x="1819275" y="3272926"/>
-            <a:ext cx="13735050" cy="584775"/>
-          </a:xfrm>
-          <a:prstGeom prst="rect">
-            <a:avLst/>
-          </a:prstGeom>
-          <a:noFill/>
-        </p:spPr>
-        <p:txBody>
-          <a:bodyPr wrap="square" rtlCol="0">
-            <a:spAutoFit/>
-          </a:bodyPr>
-          <a:lstStyle/>
-          <a:p>
-            <a:pPr marL="285750" indent="-285750" algn="l">
-              <a:buFont typeface="Arial" panose="020B0604020202020204" pitchFamily="34" charset="0"/>
-              <a:buChar char="•"/>
-            </a:pPr>
             <a:r>
-              <a:rPr lang="en-US" sz="3200" dirty="0"/>
-              <a:t>Trade-offs (users/groups/broadcasting)</a:t>
+              <a:rPr lang="en-US" dirty="0"/>
+              <a:t> user management)</a:t>
             </a:r>
           </a:p>
         </p:txBody>
       </p:sp>
       <p:pic>
         <p:nvPicPr>
-          <p:cNvPr id="15" name="Picture 14">
+          <p:cNvPr id="5" name="Picture 4">
             <a:extLst>
               <a:ext uri="{FF2B5EF4-FFF2-40B4-BE49-F238E27FC236}">
-                <a16:creationId xmlns:a16="http://schemas.microsoft.com/office/drawing/2014/main" id="{C2ADF83C-2DB1-CBB5-A142-2E7E21EBAC04}"/>
+                <a16:creationId xmlns:a16="http://schemas.microsoft.com/office/drawing/2014/main" id="{5EC3BB38-EE53-5466-C91B-4ACA328F152B}"/>
               </a:ext>
             </a:extLst>
           </p:cNvPr>
@@ -10745,8 +11605,8 @@
         </p:blipFill>
         <p:spPr>
           <a:xfrm>
-            <a:off x="7786687" y="3272926"/>
-            <a:ext cx="9005821" cy="5875836"/>
+            <a:off x="828675" y="2266949"/>
+            <a:ext cx="16940489" cy="7537237"/>
           </a:xfrm>
           <a:prstGeom prst="rect">
             <a:avLst/>
@@ -10756,449 +11616,13 @@
     </p:spTree>
     <p:extLst>
       <p:ext uri="{BB962C8B-B14F-4D97-AF65-F5344CB8AC3E}">
-        <p14:creationId xmlns:p14="http://schemas.microsoft.com/office/powerpoint/2010/main" val="3566949938"/>
+        <p14:creationId xmlns:p14="http://schemas.microsoft.com/office/powerpoint/2010/main" val="322439472"/>
       </p:ext>
     </p:extLst>
   </p:cSld>
   <p:clrMapOvr>
     <a:masterClrMapping/>
   </p:clrMapOvr>
-  <p:timing>
-    <p:tnLst>
-      <p:par>
-        <p:cTn id="1" dur="indefinite" restart="never" nodeType="tmRoot">
-          <p:childTnLst>
-            <p:seq concurrent="1" nextAc="seek">
-              <p:cTn id="2" dur="indefinite" nodeType="mainSeq">
-                <p:childTnLst>
-                  <p:par>
-                    <p:cTn id="3" fill="hold">
-                      <p:stCondLst>
-                        <p:cond delay="indefinite"/>
-                      </p:stCondLst>
-                      <p:childTnLst>
-                        <p:par>
-                          <p:cTn id="4" fill="hold">
-                            <p:stCondLst>
-                              <p:cond delay="0"/>
-                            </p:stCondLst>
-                            <p:childTnLst>
-                              <p:par>
-                                <p:cTn id="5" presetID="10" presetClass="entr" presetSubtype="0" fill="hold" grpId="0" nodeType="clickEffect">
-                                  <p:stCondLst>
-                                    <p:cond delay="0"/>
-                                  </p:stCondLst>
-                                  <p:childTnLst>
-                                    <p:set>
-                                      <p:cBhvr>
-                                        <p:cTn id="6" dur="1" fill="hold">
-                                          <p:stCondLst>
-                                            <p:cond delay="0"/>
-                                          </p:stCondLst>
-                                        </p:cTn>
-                                        <p:tgtEl>
-                                          <p:spTgt spid="5"/>
-                                        </p:tgtEl>
-                                        <p:attrNameLst>
-                                          <p:attrName>style.visibility</p:attrName>
-                                        </p:attrNameLst>
-                                      </p:cBhvr>
-                                      <p:to>
-                                        <p:strVal val="visible"/>
-                                      </p:to>
-                                    </p:set>
-                                    <p:animEffect transition="in" filter="fade">
-                                      <p:cBhvr>
-                                        <p:cTn id="7" dur="500"/>
-                                        <p:tgtEl>
-                                          <p:spTgt spid="5"/>
-                                        </p:tgtEl>
-                                      </p:cBhvr>
-                                    </p:animEffect>
-                                  </p:childTnLst>
-                                </p:cTn>
-                              </p:par>
-                            </p:childTnLst>
-                          </p:cTn>
-                        </p:par>
-                      </p:childTnLst>
-                    </p:cTn>
-                  </p:par>
-                  <p:par>
-                    <p:cTn id="8" fill="hold">
-                      <p:stCondLst>
-                        <p:cond delay="indefinite"/>
-                      </p:stCondLst>
-                      <p:childTnLst>
-                        <p:par>
-                          <p:cTn id="9" fill="hold">
-                            <p:stCondLst>
-                              <p:cond delay="0"/>
-                            </p:stCondLst>
-                            <p:childTnLst>
-                              <p:par>
-                                <p:cTn id="10" presetID="10" presetClass="entr" presetSubtype="0" fill="hold" grpId="0" nodeType="clickEffect">
-                                  <p:stCondLst>
-                                    <p:cond delay="0"/>
-                                  </p:stCondLst>
-                                  <p:childTnLst>
-                                    <p:set>
-                                      <p:cBhvr>
-                                        <p:cTn id="11" dur="1" fill="hold">
-                                          <p:stCondLst>
-                                            <p:cond delay="0"/>
-                                          </p:stCondLst>
-                                        </p:cTn>
-                                        <p:tgtEl>
-                                          <p:spTgt spid="9"/>
-                                        </p:tgtEl>
-                                        <p:attrNameLst>
-                                          <p:attrName>style.visibility</p:attrName>
-                                        </p:attrNameLst>
-                                      </p:cBhvr>
-                                      <p:to>
-                                        <p:strVal val="visible"/>
-                                      </p:to>
-                                    </p:set>
-                                    <p:animEffect transition="in" filter="fade">
-                                      <p:cBhvr>
-                                        <p:cTn id="12" dur="500"/>
-                                        <p:tgtEl>
-                                          <p:spTgt spid="9"/>
-                                        </p:tgtEl>
-                                      </p:cBhvr>
-                                    </p:animEffect>
-                                  </p:childTnLst>
-                                </p:cTn>
-                              </p:par>
-                            </p:childTnLst>
-                          </p:cTn>
-                        </p:par>
-                      </p:childTnLst>
-                    </p:cTn>
-                  </p:par>
-                  <p:par>
-                    <p:cTn id="13" fill="hold">
-                      <p:stCondLst>
-                        <p:cond delay="indefinite"/>
-                      </p:stCondLst>
-                      <p:childTnLst>
-                        <p:par>
-                          <p:cTn id="14" fill="hold">
-                            <p:stCondLst>
-                              <p:cond delay="0"/>
-                            </p:stCondLst>
-                            <p:childTnLst>
-                              <p:par>
-                                <p:cTn id="15" presetID="26" presetClass="entr" presetSubtype="0" fill="hold" nodeType="clickEffect">
-                                  <p:stCondLst>
-                                    <p:cond delay="0"/>
-                                  </p:stCondLst>
-                                  <p:childTnLst>
-                                    <p:set>
-                                      <p:cBhvr>
-                                        <p:cTn id="16" dur="1" fill="hold">
-                                          <p:stCondLst>
-                                            <p:cond delay="0"/>
-                                          </p:stCondLst>
-                                        </p:cTn>
-                                        <p:tgtEl>
-                                          <p:spTgt spid="15"/>
-                                        </p:tgtEl>
-                                        <p:attrNameLst>
-                                          <p:attrName>style.visibility</p:attrName>
-                                        </p:attrNameLst>
-                                      </p:cBhvr>
-                                      <p:to>
-                                        <p:strVal val="visible"/>
-                                      </p:to>
-                                    </p:set>
-                                    <p:animEffect transition="in" filter="wipe(down)">
-                                      <p:cBhvr>
-                                        <p:cTn id="17" dur="580">
-                                          <p:stCondLst>
-                                            <p:cond delay="0"/>
-                                          </p:stCondLst>
-                                        </p:cTn>
-                                        <p:tgtEl>
-                                          <p:spTgt spid="15"/>
-                                        </p:tgtEl>
-                                      </p:cBhvr>
-                                    </p:animEffect>
-                                    <p:anim calcmode="lin" valueType="num">
-                                      <p:cBhvr>
-                                        <p:cTn id="18" dur="1822" tmFilter="0,0; 0.14,0.36; 0.43,0.73; 0.71,0.91; 1.0,1.0">
-                                          <p:stCondLst>
-                                            <p:cond delay="0"/>
-                                          </p:stCondLst>
-                                        </p:cTn>
-                                        <p:tgtEl>
-                                          <p:spTgt spid="15"/>
-                                        </p:tgtEl>
-                                        <p:attrNameLst>
-                                          <p:attrName>ppt_x</p:attrName>
-                                        </p:attrNameLst>
-                                      </p:cBhvr>
-                                      <p:tavLst>
-                                        <p:tav tm="0">
-                                          <p:val>
-                                            <p:strVal val="#ppt_x-0.25"/>
-                                          </p:val>
-                                        </p:tav>
-                                        <p:tav tm="100000">
-                                          <p:val>
-                                            <p:strVal val="#ppt_x"/>
-                                          </p:val>
-                                        </p:tav>
-                                      </p:tavLst>
-                                    </p:anim>
-                                    <p:anim calcmode="lin" valueType="num">
-                                      <p:cBhvr>
-                                        <p:cTn id="19" dur="664" tmFilter="0.0,0.0; 0.25,0.07; 0.50,0.2; 0.75,0.467; 1.0,1.0">
-                                          <p:stCondLst>
-                                            <p:cond delay="0"/>
-                                          </p:stCondLst>
-                                        </p:cTn>
-                                        <p:tgtEl>
-                                          <p:spTgt spid="15"/>
-                                        </p:tgtEl>
-                                        <p:attrNameLst>
-                                          <p:attrName>ppt_y</p:attrName>
-                                        </p:attrNameLst>
-                                      </p:cBhvr>
-                                      <p:tavLst>
-                                        <p:tav tm="0" fmla="#ppt_y-sin(pi*$)/3">
-                                          <p:val>
-                                            <p:fltVal val="0.5"/>
-                                          </p:val>
-                                        </p:tav>
-                                        <p:tav tm="100000">
-                                          <p:val>
-                                            <p:fltVal val="1"/>
-                                          </p:val>
-                                        </p:tav>
-                                      </p:tavLst>
-                                    </p:anim>
-                                    <p:anim calcmode="lin" valueType="num">
-                                      <p:cBhvr>
-                                        <p:cTn id="20" dur="664" tmFilter="0, 0; 0.125,0.2665; 0.25,0.4; 0.375,0.465; 0.5,0.5;  0.625,0.535; 0.75,0.6; 0.875,0.7335; 1,1">
-                                          <p:stCondLst>
-                                            <p:cond delay="664"/>
-                                          </p:stCondLst>
-                                        </p:cTn>
-                                        <p:tgtEl>
-                                          <p:spTgt spid="15"/>
-                                        </p:tgtEl>
-                                        <p:attrNameLst>
-                                          <p:attrName>ppt_y</p:attrName>
-                                        </p:attrNameLst>
-                                      </p:cBhvr>
-                                      <p:tavLst>
-                                        <p:tav tm="0" fmla="#ppt_y-sin(pi*$)/9">
-                                          <p:val>
-                                            <p:fltVal val="0"/>
-                                          </p:val>
-                                        </p:tav>
-                                        <p:tav tm="100000">
-                                          <p:val>
-                                            <p:fltVal val="1"/>
-                                          </p:val>
-                                        </p:tav>
-                                      </p:tavLst>
-                                    </p:anim>
-                                    <p:anim calcmode="lin" valueType="num">
-                                      <p:cBhvr>
-                                        <p:cTn id="21" dur="332" tmFilter="0, 0; 0.125,0.2665; 0.25,0.4; 0.375,0.465; 0.5,0.5;  0.625,0.535; 0.75,0.6; 0.875,0.7335; 1,1">
-                                          <p:stCondLst>
-                                            <p:cond delay="1324"/>
-                                          </p:stCondLst>
-                                        </p:cTn>
-                                        <p:tgtEl>
-                                          <p:spTgt spid="15"/>
-                                        </p:tgtEl>
-                                        <p:attrNameLst>
-                                          <p:attrName>ppt_y</p:attrName>
-                                        </p:attrNameLst>
-                                      </p:cBhvr>
-                                      <p:tavLst>
-                                        <p:tav tm="0" fmla="#ppt_y-sin(pi*$)/27">
-                                          <p:val>
-                                            <p:fltVal val="0"/>
-                                          </p:val>
-                                        </p:tav>
-                                        <p:tav tm="100000">
-                                          <p:val>
-                                            <p:fltVal val="1"/>
-                                          </p:val>
-                                        </p:tav>
-                                      </p:tavLst>
-                                    </p:anim>
-                                    <p:anim calcmode="lin" valueType="num">
-                                      <p:cBhvr>
-                                        <p:cTn id="22" dur="164" tmFilter="0, 0; 0.125,0.2665; 0.25,0.4; 0.375,0.465; 0.5,0.5;  0.625,0.535; 0.75,0.6; 0.875,0.7335; 1,1">
-                                          <p:stCondLst>
-                                            <p:cond delay="1656"/>
-                                          </p:stCondLst>
-                                        </p:cTn>
-                                        <p:tgtEl>
-                                          <p:spTgt spid="15"/>
-                                        </p:tgtEl>
-                                        <p:attrNameLst>
-                                          <p:attrName>ppt_y</p:attrName>
-                                        </p:attrNameLst>
-                                      </p:cBhvr>
-                                      <p:tavLst>
-                                        <p:tav tm="0" fmla="#ppt_y-sin(pi*$)/81">
-                                          <p:val>
-                                            <p:fltVal val="0"/>
-                                          </p:val>
-                                        </p:tav>
-                                        <p:tav tm="100000">
-                                          <p:val>
-                                            <p:fltVal val="1"/>
-                                          </p:val>
-                                        </p:tav>
-                                      </p:tavLst>
-                                    </p:anim>
-                                    <p:animScale>
-                                      <p:cBhvr>
-                                        <p:cTn id="23" dur="26">
-                                          <p:stCondLst>
-                                            <p:cond delay="650"/>
-                                          </p:stCondLst>
-                                        </p:cTn>
-                                        <p:tgtEl>
-                                          <p:spTgt spid="15"/>
-                                        </p:tgtEl>
-                                      </p:cBhvr>
-                                      <p:to x="100000" y="60000"/>
-                                    </p:animScale>
-                                    <p:animScale>
-                                      <p:cBhvr>
-                                        <p:cTn id="24" dur="166" decel="50000">
-                                          <p:stCondLst>
-                                            <p:cond delay="676"/>
-                                          </p:stCondLst>
-                                        </p:cTn>
-                                        <p:tgtEl>
-                                          <p:spTgt spid="15"/>
-                                        </p:tgtEl>
-                                      </p:cBhvr>
-                                      <p:to x="100000" y="100000"/>
-                                    </p:animScale>
-                                    <p:animScale>
-                                      <p:cBhvr>
-                                        <p:cTn id="25" dur="26">
-                                          <p:stCondLst>
-                                            <p:cond delay="1312"/>
-                                          </p:stCondLst>
-                                        </p:cTn>
-                                        <p:tgtEl>
-                                          <p:spTgt spid="15"/>
-                                        </p:tgtEl>
-                                      </p:cBhvr>
-                                      <p:to x="100000" y="80000"/>
-                                    </p:animScale>
-                                    <p:animScale>
-                                      <p:cBhvr>
-                                        <p:cTn id="26" dur="166" decel="50000">
-                                          <p:stCondLst>
-                                            <p:cond delay="1338"/>
-                                          </p:stCondLst>
-                                        </p:cTn>
-                                        <p:tgtEl>
-                                          <p:spTgt spid="15"/>
-                                        </p:tgtEl>
-                                      </p:cBhvr>
-                                      <p:to x="100000" y="100000"/>
-                                    </p:animScale>
-                                    <p:animScale>
-                                      <p:cBhvr>
-                                        <p:cTn id="27" dur="26">
-                                          <p:stCondLst>
-                                            <p:cond delay="1642"/>
-                                          </p:stCondLst>
-                                        </p:cTn>
-                                        <p:tgtEl>
-                                          <p:spTgt spid="15"/>
-                                        </p:tgtEl>
-                                      </p:cBhvr>
-                                      <p:to x="100000" y="90000"/>
-                                    </p:animScale>
-                                    <p:animScale>
-                                      <p:cBhvr>
-                                        <p:cTn id="28" dur="166" decel="50000">
-                                          <p:stCondLst>
-                                            <p:cond delay="1668"/>
-                                          </p:stCondLst>
-                                        </p:cTn>
-                                        <p:tgtEl>
-                                          <p:spTgt spid="15"/>
-                                        </p:tgtEl>
-                                      </p:cBhvr>
-                                      <p:to x="100000" y="100000"/>
-                                    </p:animScale>
-                                    <p:animScale>
-                                      <p:cBhvr>
-                                        <p:cTn id="29" dur="26">
-                                          <p:stCondLst>
-                                            <p:cond delay="1808"/>
-                                          </p:stCondLst>
-                                        </p:cTn>
-                                        <p:tgtEl>
-                                          <p:spTgt spid="15"/>
-                                        </p:tgtEl>
-                                      </p:cBhvr>
-                                      <p:to x="100000" y="95000"/>
-                                    </p:animScale>
-                                    <p:animScale>
-                                      <p:cBhvr>
-                                        <p:cTn id="30" dur="166" decel="50000">
-                                          <p:stCondLst>
-                                            <p:cond delay="1834"/>
-                                          </p:stCondLst>
-                                        </p:cTn>
-                                        <p:tgtEl>
-                                          <p:spTgt spid="15"/>
-                                        </p:tgtEl>
-                                      </p:cBhvr>
-                                      <p:to x="100000" y="100000"/>
-                                    </p:animScale>
-                                  </p:childTnLst>
-                                </p:cTn>
-                              </p:par>
-                            </p:childTnLst>
-                          </p:cTn>
-                        </p:par>
-                      </p:childTnLst>
-                    </p:cTn>
-                  </p:par>
-                </p:childTnLst>
-              </p:cTn>
-              <p:prevCondLst>
-                <p:cond evt="onPrev" delay="0">
-                  <p:tgtEl>
-                    <p:sldTgt/>
-                  </p:tgtEl>
-                </p:cond>
-              </p:prevCondLst>
-              <p:nextCondLst>
-                <p:cond evt="onNext" delay="0">
-                  <p:tgtEl>
-                    <p:sldTgt/>
-                  </p:tgtEl>
-                </p:cond>
-              </p:nextCondLst>
-            </p:seq>
-          </p:childTnLst>
-        </p:cTn>
-      </p:par>
-    </p:tnLst>
-    <p:bldLst>
-      <p:bldP spid="5" grpId="0"/>
-      <p:bldP spid="9" grpId="0"/>
-    </p:bldLst>
-  </p:timing>
 </p:sld>
 </file>
 
@@ -11848,6 +12272,21 @@
 </file>
 
 <file path=customXml/item1.xml><?xml version="1.0" encoding="utf-8"?>
+<?mso-contentType ?>
+<FormTemplates xmlns="http://schemas.microsoft.com/sharepoint/v3/contenttype/forms">
+  <Display>DocumentLibraryForm</Display>
+  <Edit>DocumentLibraryForm</Edit>
+  <New>DocumentLibraryForm</New>
+</FormTemplates>
+</file>
+
+<file path=customXml/item2.xml><?xml version="1.0" encoding="utf-8"?>
+<p:properties xmlns:p="http://schemas.microsoft.com/office/2006/metadata/properties" xmlns:xsi="http://www.w3.org/2001/XMLSchema-instance" xmlns:pc="http://schemas.microsoft.com/office/infopath/2007/PartnerControls">
+  <documentManagement/>
+</p:properties>
+</file>
+
+<file path=customXml/item3.xml><?xml version="1.0" encoding="utf-8"?>
 <ct:contentTypeSchema xmlns:ct="http://schemas.microsoft.com/office/2006/metadata/contentType" xmlns:ma="http://schemas.microsoft.com/office/2006/metadata/properties/metaAttributes" ct:_="" ma:_="" ma:contentTypeName="Document" ma:contentTypeID="0x010100B1EDA3959F5652479FD22C0F2500B83D" ma:contentTypeVersion="6" ma:contentTypeDescription="Een nieuw document maken." ma:contentTypeScope="" ma:versionID="b2766be02785903ad09cd51475cb1dc1">
   <xsd:schema xmlns:xsd="http://www.w3.org/2001/XMLSchema" xmlns:xs="http://www.w3.org/2001/XMLSchema" xmlns:p="http://schemas.microsoft.com/office/2006/metadata/properties" xmlns:ns2="07de09e0-31b5-4a84-a978-2ff52100208d" xmlns:ns3="3dadfc23-1fe6-46f5-b9b3-2c47db85b832" targetNamespace="http://schemas.microsoft.com/office/2006/metadata/properties" ma:root="true" ma:fieldsID="ca2aac55a5561dc83b4c6d505b892845" ns2:_="" ns3:_="">
     <xsd:import namespace="07de09e0-31b5-4a84-a978-2ff52100208d"/>
@@ -12024,36 +12463,10 @@
 </ct:contentTypeSchema>
 </file>
 
-<file path=customXml/item2.xml><?xml version="1.0" encoding="utf-8"?>
-<p:properties xmlns:p="http://schemas.microsoft.com/office/2006/metadata/properties" xmlns:xsi="http://www.w3.org/2001/XMLSchema-instance" xmlns:pc="http://schemas.microsoft.com/office/infopath/2007/PartnerControls">
-  <documentManagement/>
-</p:properties>
-</file>
-
-<file path=customXml/item3.xml><?xml version="1.0" encoding="utf-8"?>
-<?mso-contentType ?>
-<FormTemplates xmlns="http://schemas.microsoft.com/sharepoint/v3/contenttype/forms">
-  <Display>DocumentLibraryForm</Display>
-  <Edit>DocumentLibraryForm</Edit>
-  <New>DocumentLibraryForm</New>
-</FormTemplates>
-</file>
-
 <file path=customXml/itemProps1.xml><?xml version="1.0" encoding="utf-8"?>
-<ds:datastoreItem xmlns:ds="http://schemas.openxmlformats.org/officeDocument/2006/customXml" ds:itemID="{7E56D321-BAD3-422D-A440-F81935A3B294}">
+<ds:datastoreItem xmlns:ds="http://schemas.openxmlformats.org/officeDocument/2006/customXml" ds:itemID="{D4819A24-FD0A-4873-9FDC-B9C8DEC9FA8B}">
   <ds:schemaRefs>
-    <ds:schemaRef ds:uri="http://schemas.microsoft.com/office/2006/metadata/contentType"/>
-    <ds:schemaRef ds:uri="http://schemas.microsoft.com/office/2006/metadata/properties/metaAttributes"/>
-    <ds:schemaRef ds:uri="http://www.w3.org/2001/XMLSchema"/>
-    <ds:schemaRef ds:uri="http://schemas.microsoft.com/office/2006/metadata/properties"/>
-    <ds:schemaRef ds:uri="07de09e0-31b5-4a84-a978-2ff52100208d"/>
-    <ds:schemaRef ds:uri="3dadfc23-1fe6-46f5-b9b3-2c47db85b832"/>
-    <ds:schemaRef ds:uri="http://schemas.microsoft.com/office/2006/documentManagement/types"/>
-    <ds:schemaRef ds:uri="http://schemas.microsoft.com/office/infopath/2007/PartnerControls"/>
-    <ds:schemaRef ds:uri="http://schemas.openxmlformats.org/package/2006/metadata/core-properties"/>
-    <ds:schemaRef ds:uri="http://purl.org/dc/elements/1.1/"/>
-    <ds:schemaRef ds:uri="http://purl.org/dc/terms/"/>
-    <ds:schemaRef ds:uri="http://schemas.microsoft.com/internal/obd"/>
+    <ds:schemaRef ds:uri="http://schemas.microsoft.com/sharepoint/v3/contenttype/forms"/>
   </ds:schemaRefs>
 </ds:datastoreItem>
 </file>
@@ -12076,9 +12489,20 @@
 </file>
 
 <file path=customXml/itemProps3.xml><?xml version="1.0" encoding="utf-8"?>
-<ds:datastoreItem xmlns:ds="http://schemas.openxmlformats.org/officeDocument/2006/customXml" ds:itemID="{D4819A24-FD0A-4873-9FDC-B9C8DEC9FA8B}">
+<ds:datastoreItem xmlns:ds="http://schemas.openxmlformats.org/officeDocument/2006/customXml" ds:itemID="{7E56D321-BAD3-422D-A440-F81935A3B294}">
   <ds:schemaRefs>
-    <ds:schemaRef ds:uri="http://schemas.microsoft.com/sharepoint/v3/contenttype/forms"/>
+    <ds:schemaRef ds:uri="http://schemas.microsoft.com/office/2006/metadata/contentType"/>
+    <ds:schemaRef ds:uri="http://schemas.microsoft.com/office/2006/metadata/properties/metaAttributes"/>
+    <ds:schemaRef ds:uri="http://www.w3.org/2001/XMLSchema"/>
+    <ds:schemaRef ds:uri="http://schemas.microsoft.com/office/2006/metadata/properties"/>
+    <ds:schemaRef ds:uri="07de09e0-31b5-4a84-a978-2ff52100208d"/>
+    <ds:schemaRef ds:uri="3dadfc23-1fe6-46f5-b9b3-2c47db85b832"/>
+    <ds:schemaRef ds:uri="http://schemas.microsoft.com/office/2006/documentManagement/types"/>
+    <ds:schemaRef ds:uri="http://schemas.microsoft.com/office/infopath/2007/PartnerControls"/>
+    <ds:schemaRef ds:uri="http://schemas.openxmlformats.org/package/2006/metadata/core-properties"/>
+    <ds:schemaRef ds:uri="http://purl.org/dc/elements/1.1/"/>
+    <ds:schemaRef ds:uri="http://purl.org/dc/terms/"/>
+    <ds:schemaRef ds:uri="http://schemas.microsoft.com/internal/obd"/>
   </ds:schemaRefs>
 </ds:datastoreItem>
 </file>
